--- a/proyecto-daclaf-crecimiento-b2c-2027/sesion_2026-10-28/Daclaf_Sistema_IA_B2C_Sesion_28oct.pptx
+++ b/proyecto-daclaf-crecimiento-b2c-2027/sesion_2026-10-28/Daclaf_Sistema_IA_B2C_Sesion_28oct.pptx
@@ -16,9 +16,10 @@
     <p:sldId id="264" r:id="rId10"/>
     <p:sldId id="265" r:id="rId11"/>
     <p:sldId id="266" r:id="rId12"/>
+    <p:sldId id="267" r:id="rId13"/>
   </p:sldIdLst>
   <p:notesMasterIdLst>
-    <p:notesMasterId r:id="rId13"/>
+    <p:notesMasterId r:id="rId14"/>
   </p:notesMasterIdLst>
   <p:sldSz cx="9144000" cy="5143500"/>
   <p:notesSz cx="5143500" cy="9144000"/>
@@ -117,35 +118,36 @@
   <p:extLst>
     <p:ext uri="{521415D9-36F7-43E2-AB2F-B90AF26B5E84}">
       <p14:sectionLst xmlns:p14="http://schemas.microsoft.com/office/powerpoint/2010/main">
-        <p14:section name="Apertura" id="{9a7a3be2-c33a-dc91-4573-670872b6161e}">
+        <p14:section name="Apertura" id="{e48f96e1-ac4f-667c-460b-fb3a791c40a8}">
           <p14:sldIdLst>
             <p14:sldId id="256"/>
           </p14:sldIdLst>
         </p14:section>
-        <p14:section name="Contexto" id="{abeca480-d33e-d1a9-d965-f6ad132d05d5}">
+        <p14:section name="Contexto" id="{df0e13db-b30a-11b7-a67a-cd74f2b35f89}">
           <p14:sldIdLst>
             <p14:sldId id="257"/>
             <p14:sldId id="258"/>
           </p14:sldIdLst>
         </p14:section>
-        <p14:section name="Diseño" id="{7f8bcb04-75a2-4bfb-b9e6-607a3af23232}">
+        <p14:section name="Diseño" id="{9f972316-62e5-0380-e7f8-e5db2fc3aa1e}">
           <p14:sldIdLst>
             <p14:sldId id="259"/>
             <p14:sldId id="260"/>
             <p14:sldId id="261"/>
+            <p14:sldId id="262"/>
           </p14:sldIdLst>
         </p14:section>
-        <p14:section name="Plan" id="{2612ad8d-dc11-f17d-0e0b-8177d30fc378}">
+        <p14:section name="Plan" id="{d7b7611a-ef1c-c70a-ad41-8a141bf3d2e8}">
           <p14:sldIdLst>
-            <p14:sldId id="262"/>
             <p14:sldId id="263"/>
+            <p14:sldId id="264"/>
           </p14:sldIdLst>
         </p14:section>
-        <p14:section name="Preguntas en vivo" id="{e07b843a-cd33-8c31-cd4f-7fc174135a1b}">
+        <p14:section name="Preguntas en vivo" id="{614100b0-b18c-dfcf-31ca-7beb071ad66d}">
           <p14:sldIdLst>
-            <p14:sldId id="264"/>
             <p14:sldId id="265"/>
             <p14:sldId id="266"/>
+            <p14:sldId id="267"/>
           </p14:sldIdLst>
         </p14:section>
       </p14:sectionLst>
@@ -640,14 +642,14 @@
           <a:p>
             <a:r>
               <a:rPr lang="en-US" dirty="0"/>
-              <a:t>Q5 ¿Cuál es la mezcla esperada: extender marcas actuales, crear marcas nuevas o adquirirlas? ¿Qué categorías van primero: protección y post-solar, cuidado personal, suplementos, OTC, mascotas?
-Por qué importa: Seis marcas tienen entre 1 y 4 productos: ahí hay espacio sin crear marcas. Define a quién investigamos primero.
-Q6 ¿Qué capacidad tiene Lerma (incluida la línea WDS), qué proporción del volumen nuevo iría a maquila y existen maquiladores ya calificados por categoría? ¿Quién responde por Operaciones?
-Por qué importa: El ritmo de lanzamiento no puede superar la capacidad de surtir.
-Q7 ¿Hay registros sanitarios OTC vigentes que se puedan extender o trámites en curso? ¿Hay apetito por adquirir dossiers? ¿Quién de Asuntos Regulatorios validará lo que proponga el sistema?
-Por qué importa: El carril OTC tiene ciclo largo y debe arrancar ya. El sistema no sustituye el criterio de Regulatorio.
-Q8 ¿Cuál es el criterio de éxito de un SKU a 6 y a 12 meses (venta mínima, margen, rotación)? ¿Existe hoy una regla de descontinuación y qué tolerancia hay a SKUs que fracasan o a inventario próximo a caducar?
-Por qué importa: Sin regla de salida, 300 SKUs multiplican inventario, caducidades y artículos en NetSuite.</a:t>
+              <a:t>Q1 ¿La meta es llegar a 300 SKUs en cartera o lanzar 300 productos? ¿Cuentan kits, presentaciones y ediciones limitadas como SKU?
+Por qué importa: Con 43–50 SKUs hoy, la diferencia es de unos 250 netos más la reposición de los que salgan. Cambia el embudo y el presupuesto.
+Q2 ¿El horizonte para llegar a la meta es de 2 años (150 al año, 12–13 al mes) o de 3 años (100 al año, 8–9 al mes)?
+Por qué importa: Define el ritmo de la célula de lanzamientos y la carga del Presupuesto 2027.
+Q3 ¿Quién puede entregar el maestro de artículos de NetSuite (DF y DAS) y las ventas por SKU y marca de 2024 a 2026, y para qué fecha?
+Por qué importa: Sin esto no hay punto de partida. El catálogo web no es el maestro.
+Q4 ¿Cuántos productos se lanzaron en 2024 y 2025, en cuánto tiempo, y en qué paso se atora hoy un lanzamiento: regulatorio, diseño, compras, aprobaciones, maquila o alta en NetSuite?
+Por qué importa: El 'cuello de botella' decide dónde automatizar y qué plataformas reutilizables construir primero.</a:t>
             </a:r>
             <a:endParaRPr lang="en-US" dirty="0"/>
           </a:p>
@@ -735,6 +737,101 @@
           <a:p>
             <a:r>
               <a:rPr lang="en-US" dirty="0"/>
+              <a:t>Q5 ¿Cuál es la mezcla esperada: extender marcas actuales, crear marcas nuevas o adquirirlas? ¿Qué categorías van primero: protección y post-solar, cuidado personal, suplementos, OTC, mascotas?
+Por qué importa: Seis marcas tienen entre 1 y 4 productos: ahí hay espacio sin crear marcas. Define a quién investigamos primero.
+Q6 ¿Qué capacidad tiene Lerma (incluida la línea WDS), qué proporción del volumen nuevo iría a maquila y existen maquiladores ya calificados por categoría? ¿Quién responde por Operaciones?
+Por qué importa: El ritmo de lanzamiento no puede superar la capacidad de surtir.
+Q7 ¿Hay registros sanitarios OTC vigentes que se puedan extender o trámites en curso? ¿Hay apetito por adquirir dossiers? ¿Quién de Asuntos Regulatorios validará lo que proponga el sistema?
+Por qué importa: El carril OTC tiene ciclo largo y debe arrancar ya. El sistema no sustituye el criterio de Regulatorio.
+Q8 ¿Cuál es el criterio de éxito de un SKU a 6 y a 12 meses (venta mínima, margen, rotación)? ¿Existe hoy una regla de descontinuación y qué tolerancia hay a SKUs que fracasan o a inventario próximo a caducar?
+Por qué importa: Sin regla de salida, 300 SKUs multiplican inventario, caducidades y artículos en NetSuite.</a:t>
+            </a:r>
+            <a:endParaRPr lang="en-US" dirty="0"/>
+          </a:p>
+        </p:txBody>
+      </p:sp>
+      <p:sp>
+        <p:nvSpPr>
+          <p:cNvPr id="4" name="Slide Number Placeholder 3"/>
+          <p:cNvSpPr>
+            <a:spLocks noGrp="1"/>
+          </p:cNvSpPr>
+          <p:nvPr>
+            <p:ph type="sldNum" sz="quarter" idx="10"/>
+          </p:nvPr>
+        </p:nvSpPr>
+        <p:spPr/>
+        <p:txBody>
+          <a:bodyPr/>
+          <a:lstStyle/>
+          <a:p>
+            <a:fld id="{F7021451-1387-4CA6-816F-3879F97B5CBC}" type="slidenum">
+              <a:rPr lang="en-US"/>
+              <a:t>11</a:t>
+            </a:fld>
+            <a:endParaRPr lang="en-US"/>
+          </a:p>
+        </p:txBody>
+      </p:sp>
+    </p:spTree>
+    <p:extLst>
+      <p:ext uri="{BB962C8B-B14F-4D97-AF65-F5344CB8AC3E}">
+        <p14:creationId xmlns:p14="http://schemas.microsoft.com/office/powerpoint/2010/main" val="1024086991"/>
+      </p:ext>
+    </p:extLst>
+  </p:cSld>
+  <p:clrMapOvr>
+    <a:masterClrMapping/>
+  </p:clrMapOvr>
+</p:notes>
+</file>
+
+<file path=ppt/notesSlides/notesSlide12.xml><?xml version="1.0" encoding="utf-8"?>
+<p:notes xmlns:a="http://schemas.openxmlformats.org/drawingml/2006/main" xmlns:r="http://schemas.openxmlformats.org/officeDocument/2006/relationships" xmlns:p="http://schemas.openxmlformats.org/presentationml/2006/main">
+  <p:cSld>
+    <p:spTree>
+      <p:nvGrpSpPr>
+        <p:cNvPr id="1" name=""/>
+        <p:cNvGrpSpPr/>
+        <p:nvPr/>
+      </p:nvGrpSpPr>
+      <p:grpSpPr>
+        <a:xfrm>
+          <a:off x="0" y="0"/>
+          <a:ext cx="0" cy="0"/>
+          <a:chOff x="0" y="0"/>
+          <a:chExt cx="0" cy="0"/>
+        </a:xfrm>
+      </p:grpSpPr>
+      <p:sp>
+        <p:nvSpPr>
+          <p:cNvPr id="2" name="Slide Image Placeholder 1"/>
+          <p:cNvSpPr>
+            <a:spLocks noGrp="1" noRot="1" noChangeAspect="1"/>
+          </p:cNvSpPr>
+          <p:nvPr>
+            <p:ph type="sldImg"/>
+          </p:nvPr>
+        </p:nvSpPr>
+        <p:spPr/>
+      </p:sp>
+      <p:sp>
+        <p:nvSpPr>
+          <p:cNvPr id="3" name="Notes Placeholder 2"/>
+          <p:cNvSpPr>
+            <a:spLocks noGrp="1"/>
+          </p:cNvSpPr>
+          <p:nvPr>
+            <p:ph type="body" idx="1"/>
+          </p:nvPr>
+        </p:nvSpPr>
+        <p:spPr/>
+        <p:txBody>
+          <a:bodyPr/>
+          <a:lstStyle/>
+          <a:p>
+            <a:r>
+              <a:rPr lang="en-US" dirty="0"/>
               <a:t>Q9 ¿Existe un rango o techo para desarrollo, registros e inventario inicial del 2027? ¿Quién de Finanzas participa en la revisión?
 Por qué importa: Permite dimensionar escenarios realistas en lugar de un plan sin restricción.
 Q10 ¿Autoriza compartir ventas por SKU y capacidad en un Project compartido que opera Practical AI, con acceso para David y Sara? ¿Aprueba la regla mínima: a herramientas externas solo va información pública o anonimizada?
@@ -770,7 +867,7 @@
           <a:p>
             <a:fld id="{F7021451-1387-4CA6-816F-3879F97B5CBC}" type="slidenum">
               <a:rPr lang="en-US"/>
-              <a:t>11</a:t>
+              <a:t>12</a:t>
             </a:fld>
             <a:endParaRPr lang="en-US"/>
           </a:p>
@@ -1017,6 +1114,7 @@
 Genspark: Universo de productos por categoría, tablas comparativas
 Manus: Levantar catálogos de competidores en retail y marketplaces
 ChatGPT: Ataca los supuestos del ranking antes de llegar a ustedes
+NotebookLM responde solo con lo que está en las fuentes cargadas y cita el pasaje; reduce el riesgo de inventar, pero igual se verifica.
 Las capacidades de cada herramienta cambian con frecuencia: se prueba cada una con una tarea piloto antes de darle carga real.</a:t>
             </a:r>
             <a:endParaRPr lang="en-US" dirty="0"/>
@@ -1289,7 +1387,7 @@
           <a:p>
             <a:r>
               <a:rPr lang="en-US" dirty="0"/>
-              <a:t>El consultor estará ausente del 17 de noviembre al 3 de diciembre; por eso la entrega parcial del 13 de noviembre incluye ranking preliminar y guía de uso del Project compartido.</a:t>
+              <a:t>Cada dato externo entra al registro de evidencia con fuente, fecha y nivel de confianza. Un verificador independiente abre las fuentes; al inicio es una muestra manual de 10 filas por herramienta. Solo A y B sustentan decisiones.</a:t>
             </a:r>
             <a:endParaRPr lang="en-US" dirty="0"/>
           </a:p>
@@ -1377,7 +1475,7 @@
           <a:p>
             <a:r>
               <a:rPr lang="en-US" dirty="0"/>
-              <a:t>Con estas cuatro decisiones el trabajo de esta semana puede arrancar: definir la meta, aprobar reglas de datos, comprometer la línea base y nombrar contrapartes.</a:t>
+              <a:t>El consultor estará ausente del 17 de noviembre al 3 de diciembre; por eso la entrega parcial del 13 de noviembre incluye ranking preliminar y guía de uso del Project compartido.</a:t>
             </a:r>
             <a:endParaRPr lang="en-US" dirty="0"/>
           </a:p>
@@ -1465,14 +1563,7 @@
           <a:p>
             <a:r>
               <a:rPr lang="en-US" dirty="0"/>
-              <a:t>Q1 ¿La meta es llegar a 300 SKUs en cartera o lanzar 300 productos? ¿Cuentan kits, presentaciones y ediciones limitadas como SKU?
-Por qué importa: Con 43–50 SKUs hoy, la diferencia es de unos 250 netos más la reposición de los que salgan. Cambia el embudo y el presupuesto.
-Q2 ¿El horizonte para llegar a la meta es de 2 años (150 al año, 12–13 al mes) o de 3 años (100 al año, 8–9 al mes)?
-Por qué importa: Define el ritmo de la célula de lanzamientos y la carga del Presupuesto 2027.
-Q3 ¿Quién puede entregar el maestro de artículos de NetSuite (DF y DAS) y las ventas por SKU y marca de 2024 a 2026, y para qué fecha?
-Por qué importa: Sin esto no hay punto de partida. El catálogo web no es el maestro.
-Q4 ¿Cuántos productos se lanzaron en 2024 y 2025, en cuánto tiempo, y en qué paso se atora hoy un lanzamiento: regulatorio, diseño, compras, aprobaciones, maquila o alta en NetSuite?
-Por qué importa: El 'cuello de botella' decide dónde automatizar y qué plataformas reutilizables construir primero.</a:t>
+              <a:t>Con estas cuatro decisiones el trabajo de esta semana puede arrancar: definir la meta, aprobar reglas de datos, comprometer la línea base y nombrar contrapartes.</a:t>
             </a:r>
             <a:endParaRPr lang="en-US" dirty="0"/>
           </a:p>
@@ -2335,7 +2426,7 @@
                   <a:schemeClr val="tx1"/>
                 </a:solidFill>
               </a:rPr>
-              <a:t>Preguntas en vivo · 2 de 3</a:t>
+              <a:t>Preguntas en vivo · 1 de 3</a:t>
             </a:r>
             <a:endParaRPr lang="en-US" sz="3200" dirty="0"/>
           </a:p>
@@ -2343,7 +2434,7 @@
       </p:sp>
       <p:sp>
         <p:nvSpPr>
-          <p:cNvPr id="3" name="Pregunta Q5"/>
+          <p:cNvPr id="3" name="Pregunta Q1"/>
           <p:cNvSpPr/>
           <p:nvPr/>
         </p:nvSpPr>
@@ -2370,7 +2461,7 @@
       </p:sp>
       <p:sp>
         <p:nvSpPr>
-          <p:cNvPr id="4" name="Id Q5"/>
+          <p:cNvPr id="4" name="Id Q1"/>
           <p:cNvSpPr/>
           <p:nvPr/>
         </p:nvSpPr>
@@ -2425,7 +2516,7 @@
                   <a:schemeClr val="bg1"/>
                 </a:solidFill>
               </a:rPr>
-              <a:t>Q5</a:t>
+              <a:t>Q1</a:t>
             </a:r>
             <a:endParaRPr lang="en-US" sz="1400" dirty="0"/>
           </a:p>
@@ -2461,7 +2552,7 @@
                   <a:schemeClr val="tx1"/>
                 </a:solidFill>
               </a:rPr>
-              <a:t>¿Extender marcas, crear o adquirir?</a:t>
+              <a:t>¿300 en cartera o 300 lanzamientos?</a:t>
             </a:r>
             <a:endParaRPr lang="en-US" sz="1800" dirty="0"/>
           </a:p>
@@ -2475,7 +2566,7 @@
                   <a:schemeClr val="accent4"/>
                 </a:solidFill>
               </a:rPr>
-              <a:t>Responde: David y Sara · Portafolio</a:t>
+              <a:t>Responde: David y Sara · Meta</a:t>
             </a:r>
             <a:endParaRPr lang="en-US" sz="1800" dirty="0"/>
           </a:p>
@@ -2483,7 +2574,7 @@
       </p:sp>
       <p:sp>
         <p:nvSpPr>
-          <p:cNvPr id="7" name="Pregunta Q6"/>
+          <p:cNvPr id="7" name="Pregunta Q2"/>
           <p:cNvSpPr/>
           <p:nvPr/>
         </p:nvSpPr>
@@ -2510,7 +2601,7 @@
       </p:sp>
       <p:sp>
         <p:nvSpPr>
-          <p:cNvPr id="8" name="Id Q6"/>
+          <p:cNvPr id="8" name="Id Q2"/>
           <p:cNvSpPr/>
           <p:nvPr/>
         </p:nvSpPr>
@@ -2565,7 +2656,7 @@
                   <a:schemeClr val="bg1"/>
                 </a:solidFill>
               </a:rPr>
-              <a:t>Q6</a:t>
+              <a:t>Q2</a:t>
             </a:r>
             <a:endParaRPr lang="en-US" sz="1400" dirty="0"/>
           </a:p>
@@ -2601,7 +2692,7 @@
                   <a:schemeClr val="tx1"/>
                 </a:solidFill>
               </a:rPr>
-              <a:t>¿Qué fabrica Lerma y qué va a maquila?</a:t>
+              <a:t>¿Plazo de 2 o de 3 años?</a:t>
             </a:r>
             <a:endParaRPr lang="en-US" sz="1800" dirty="0"/>
           </a:p>
@@ -2615,7 +2706,7 @@
                   <a:schemeClr val="accent4"/>
                 </a:solidFill>
               </a:rPr>
-              <a:t>Responde: David · Fabricación</a:t>
+              <a:t>Responde: David · Meta</a:t>
             </a:r>
             <a:endParaRPr lang="en-US" sz="1800" dirty="0"/>
           </a:p>
@@ -2623,7 +2714,7 @@
       </p:sp>
       <p:sp>
         <p:nvSpPr>
-          <p:cNvPr id="11" name="Pregunta Q7"/>
+          <p:cNvPr id="11" name="Pregunta Q3"/>
           <p:cNvSpPr/>
           <p:nvPr/>
         </p:nvSpPr>
@@ -2650,7 +2741,7 @@
       </p:sp>
       <p:sp>
         <p:nvSpPr>
-          <p:cNvPr id="12" name="Id Q7"/>
+          <p:cNvPr id="12" name="Id Q3"/>
           <p:cNvSpPr/>
           <p:nvPr/>
         </p:nvSpPr>
@@ -2705,7 +2796,7 @@
                   <a:schemeClr val="bg1"/>
                 </a:solidFill>
               </a:rPr>
-              <a:t>Q7</a:t>
+              <a:t>Q3</a:t>
             </a:r>
             <a:endParaRPr lang="en-US" sz="1400" dirty="0"/>
           </a:p>
@@ -2741,7 +2832,7 @@
                   <a:schemeClr val="tx1"/>
                 </a:solidFill>
               </a:rPr>
-              <a:t>¿Registros OTC extensibles y quién valida?</a:t>
+              <a:t>¿Quién entrega maestro y ventas, y cuándo?</a:t>
             </a:r>
             <a:endParaRPr lang="en-US" sz="1800" dirty="0"/>
           </a:p>
@@ -2755,7 +2846,7 @@
                   <a:schemeClr val="accent4"/>
                 </a:solidFill>
               </a:rPr>
-              <a:t>Responde: David y Sara · Regulatorio</a:t>
+              <a:t>Responde: David y Sara · Línea base</a:t>
             </a:r>
             <a:endParaRPr lang="en-US" sz="1800" dirty="0"/>
           </a:p>
@@ -2763,7 +2854,7 @@
       </p:sp>
       <p:sp>
         <p:nvSpPr>
-          <p:cNvPr id="15" name="Pregunta Q8"/>
+          <p:cNvPr id="15" name="Pregunta Q4"/>
           <p:cNvSpPr/>
           <p:nvPr/>
         </p:nvSpPr>
@@ -2790,7 +2881,7 @@
       </p:sp>
       <p:sp>
         <p:nvSpPr>
-          <p:cNvPr id="16" name="Id Q8"/>
+          <p:cNvPr id="16" name="Id Q4"/>
           <p:cNvSpPr/>
           <p:nvPr/>
         </p:nvSpPr>
@@ -2845,7 +2936,7 @@
                   <a:schemeClr val="bg1"/>
                 </a:solidFill>
               </a:rPr>
-              <a:t>Q8</a:t>
+              <a:t>Q4</a:t>
             </a:r>
             <a:endParaRPr lang="en-US" sz="1400" dirty="0"/>
           </a:p>
@@ -2881,7 +2972,7 @@
                   <a:schemeClr val="tx1"/>
                 </a:solidFill>
               </a:rPr>
-              <a:t>¿Cuándo un SKU se considera exitoso?</a:t>
+              <a:t>¿Dónde se atora hoy un lanzamiento?</a:t>
             </a:r>
             <a:endParaRPr lang="en-US" sz="1800" dirty="0"/>
           </a:p>
@@ -2895,7 +2986,7 @@
                   <a:schemeClr val="accent4"/>
                 </a:solidFill>
               </a:rPr>
-              <a:t>Responde: David · Criterios</a:t>
+              <a:t>Responde: Sara · Proceso</a:t>
             </a:r>
             <a:endParaRPr lang="en-US" sz="1800" dirty="0"/>
           </a:p>
@@ -3003,7 +3094,7 @@
                   <a:schemeClr val="tx1"/>
                 </a:solidFill>
               </a:rPr>
-              <a:t>Preguntas en vivo · 3 de 3</a:t>
+              <a:t>Preguntas en vivo · 2 de 3</a:t>
             </a:r>
             <a:endParaRPr lang="en-US" sz="3200" dirty="0"/>
           </a:p>
@@ -3011,18 +3102,18 @@
       </p:sp>
       <p:sp>
         <p:nvSpPr>
-          <p:cNvPr id="3" name="Pregunta Q9"/>
+          <p:cNvPr id="3" name="Pregunta Q5"/>
           <p:cNvSpPr/>
           <p:nvPr/>
         </p:nvSpPr>
         <p:spPr>
           <a:xfrm>
             <a:off x="457200" y="1188720"/>
-            <a:ext cx="4754880" cy="1051560"/>
+            <a:ext cx="8229600" cy="749808"/>
           </a:xfrm>
           <a:prstGeom prst="roundRect">
             <a:avLst>
-              <a:gd name="adj" fmla="val 8696"/>
+              <a:gd name="adj" fmla="val 12195"/>
             </a:avLst>
           </a:prstGeom>
           <a:solidFill>
@@ -3038,13 +3129,13 @@
       </p:sp>
       <p:sp>
         <p:nvSpPr>
-          <p:cNvPr id="4" name="Id Q9"/>
+          <p:cNvPr id="4" name="Id Q5"/>
           <p:cNvSpPr/>
           <p:nvPr/>
         </p:nvSpPr>
         <p:spPr>
           <a:xfrm>
-            <a:off x="594360" y="1531620"/>
+            <a:off x="594360" y="1380744"/>
             <a:ext cx="548640" cy="365760"/>
           </a:xfrm>
           <a:prstGeom prst="roundRect">
@@ -3071,7 +3162,7 @@
         </p:nvSpPr>
         <p:spPr>
           <a:xfrm>
-            <a:off x="594360" y="1531620"/>
+            <a:off x="594360" y="1380744"/>
             <a:ext cx="548640" cy="365760"/>
           </a:xfrm>
           <a:prstGeom prst="rect">
@@ -3093,7 +3184,7 @@
                   <a:schemeClr val="bg1"/>
                 </a:solidFill>
               </a:rPr>
-              <a:t>Q9</a:t>
+              <a:t>Q5</a:t>
             </a:r>
             <a:endParaRPr lang="en-US" sz="1400" dirty="0"/>
           </a:p>
@@ -3108,7 +3199,7 @@
         <p:spPr>
           <a:xfrm>
             <a:off x="1325880" y="1188720"/>
-            <a:ext cx="3749040" cy="1051560"/>
+            <a:ext cx="7223760" cy="749808"/>
           </a:xfrm>
           <a:prstGeom prst="rect">
             <a:avLst/>
@@ -3124,14 +3215,14 @@
               <a:buNone/>
             </a:pPr>
             <a:r>
-              <a:rPr lang="en-US" sz="1400" b="1" dirty="0">
+              <a:rPr lang="en-US" sz="1800" b="1" dirty="0">
                 <a:solidFill>
                   <a:schemeClr val="tx1"/>
                 </a:solidFill>
               </a:rPr>
-              <a:t>¿Hay techo para el Presupuesto 2027?</a:t>
-            </a:r>
-            <a:endParaRPr lang="en-US" sz="1400" dirty="0"/>
+              <a:t>¿Extender marcas, crear o adquirir?</a:t>
+            </a:r>
+            <a:endParaRPr lang="en-US" sz="1800" dirty="0"/>
           </a:p>
           <a:p>
             <a:pPr indent="0" marL="0">
@@ -3143,26 +3234,26 @@
                   <a:schemeClr val="accent4"/>
                 </a:solidFill>
               </a:rPr>
-              <a:t>Responde: David</a:t>
-            </a:r>
-            <a:endParaRPr lang="en-US" sz="1400" dirty="0"/>
-          </a:p>
-        </p:txBody>
-      </p:sp>
-      <p:sp>
-        <p:nvSpPr>
-          <p:cNvPr id="7" name="Pregunta Q10"/>
+              <a:t>Responde: David y Sara · Portafolio</a:t>
+            </a:r>
+            <a:endParaRPr lang="en-US" sz="1800" dirty="0"/>
+          </a:p>
+        </p:txBody>
+      </p:sp>
+      <p:sp>
+        <p:nvSpPr>
+          <p:cNvPr id="7" name="Pregunta Q6"/>
           <p:cNvSpPr/>
           <p:nvPr/>
         </p:nvSpPr>
         <p:spPr>
           <a:xfrm>
-            <a:off x="457200" y="2377440"/>
-            <a:ext cx="4754880" cy="1051560"/>
+            <a:off x="457200" y="2057400"/>
+            <a:ext cx="8229600" cy="749808"/>
           </a:xfrm>
           <a:prstGeom prst="roundRect">
             <a:avLst>
-              <a:gd name="adj" fmla="val 8696"/>
+              <a:gd name="adj" fmla="val 12195"/>
             </a:avLst>
           </a:prstGeom>
           <a:solidFill>
@@ -3178,13 +3269,13 @@
       </p:sp>
       <p:sp>
         <p:nvSpPr>
-          <p:cNvPr id="8" name="Id Q10"/>
+          <p:cNvPr id="8" name="Id Q6"/>
           <p:cNvSpPr/>
           <p:nvPr/>
         </p:nvSpPr>
         <p:spPr>
           <a:xfrm>
-            <a:off x="594360" y="2720340"/>
+            <a:off x="594360" y="2249424"/>
             <a:ext cx="548640" cy="365760"/>
           </a:xfrm>
           <a:prstGeom prst="roundRect">
@@ -3211,7 +3302,7 @@
         </p:nvSpPr>
         <p:spPr>
           <a:xfrm>
-            <a:off x="594360" y="2720340"/>
+            <a:off x="594360" y="2249424"/>
             <a:ext cx="548640" cy="365760"/>
           </a:xfrm>
           <a:prstGeom prst="rect">
@@ -3233,7 +3324,7 @@
                   <a:schemeClr val="bg1"/>
                 </a:solidFill>
               </a:rPr>
-              <a:t>Q10</a:t>
+              <a:t>Q6</a:t>
             </a:r>
             <a:endParaRPr lang="en-US" sz="1400" dirty="0"/>
           </a:p>
@@ -3247,8 +3338,8 @@
         </p:nvSpPr>
         <p:spPr>
           <a:xfrm>
-            <a:off x="1325880" y="2377440"/>
-            <a:ext cx="3749040" cy="1051560"/>
+            <a:off x="1325880" y="2057400"/>
+            <a:ext cx="7223760" cy="749808"/>
           </a:xfrm>
           <a:prstGeom prst="rect">
             <a:avLst/>
@@ -3264,14 +3355,14 @@
               <a:buNone/>
             </a:pPr>
             <a:r>
-              <a:rPr lang="en-US" sz="1400" b="1" dirty="0">
+              <a:rPr lang="en-US" sz="1800" b="1" dirty="0">
                 <a:solidFill>
                   <a:schemeClr val="tx1"/>
                 </a:solidFill>
               </a:rPr>
-              <a:t>¿Autoriza el Project compartido y las reglas de datos?</a:t>
-            </a:r>
-            <a:endParaRPr lang="en-US" sz="1400" dirty="0"/>
+              <a:t>¿Qué fabrica Lerma y qué va a maquila?</a:t>
+            </a:r>
+            <a:endParaRPr lang="en-US" sz="1800" dirty="0"/>
           </a:p>
           <a:p>
             <a:pPr indent="0" marL="0">
@@ -3283,26 +3374,26 @@
                   <a:schemeClr val="accent4"/>
                 </a:solidFill>
               </a:rPr>
-              <a:t>Responde: David</a:t>
-            </a:r>
-            <a:endParaRPr lang="en-US" sz="1400" dirty="0"/>
-          </a:p>
-        </p:txBody>
-      </p:sp>
-      <p:sp>
-        <p:nvSpPr>
-          <p:cNvPr id="11" name="Si da tiempo"/>
+              <a:t>Responde: David · Fabricación</a:t>
+            </a:r>
+            <a:endParaRPr lang="en-US" sz="1800" dirty="0"/>
+          </a:p>
+        </p:txBody>
+      </p:sp>
+      <p:sp>
+        <p:nvSpPr>
+          <p:cNvPr id="11" name="Pregunta Q7"/>
           <p:cNvSpPr/>
           <p:nvPr/>
         </p:nvSpPr>
         <p:spPr>
           <a:xfrm>
-            <a:off x="5440680" y="1188720"/>
-            <a:ext cx="3246120" cy="3337560"/>
+            <a:off x="457200" y="2926080"/>
+            <a:ext cx="8229600" cy="749808"/>
           </a:xfrm>
           <a:prstGeom prst="roundRect">
             <a:avLst>
-              <a:gd name="adj" fmla="val 3380"/>
+              <a:gd name="adj" fmla="val 12195"/>
             </a:avLst>
           </a:prstGeom>
           <a:solidFill>
@@ -3318,23 +3409,86 @@
       </p:sp>
       <p:sp>
         <p:nvSpPr>
-          <p:cNvPr id="12" name="Text 10"/>
-          <p:cNvSpPr txBox="1"/>
-          <p:nvPr/>
-        </p:nvSpPr>
-        <p:spPr>
-          <a:xfrm>
-            <a:off x="5623560" y="1298448"/>
-            <a:ext cx="2926080" cy="320040"/>
-          </a:xfrm>
-          <a:prstGeom prst="rect">
-            <a:avLst/>
-          </a:prstGeom>
-          <a:noFill/>
-          <a:ln/>
-        </p:spPr>
-        <p:txBody>
-          <a:bodyPr wrap="square" lIns="0" tIns="0" rIns="0" bIns="0" rtlCol="0" anchor="t"/>
+          <p:cNvPr id="12" name="Id Q7"/>
+          <p:cNvSpPr/>
+          <p:nvPr/>
+        </p:nvSpPr>
+        <p:spPr>
+          <a:xfrm>
+            <a:off x="594360" y="3118104"/>
+            <a:ext cx="548640" cy="365760"/>
+          </a:xfrm>
+          <a:prstGeom prst="roundRect">
+            <a:avLst>
+              <a:gd name="adj" fmla="val 20000"/>
+            </a:avLst>
+          </a:prstGeom>
+          <a:solidFill>
+            <a:schemeClr val="tx1"/>
+          </a:solidFill>
+          <a:ln w="6350">
+            <a:solidFill>
+              <a:schemeClr val="tx1"/>
+            </a:solidFill>
+            <a:prstDash val="solid"/>
+          </a:ln>
+        </p:spPr>
+      </p:sp>
+      <p:sp>
+        <p:nvSpPr>
+          <p:cNvPr id="13" name="Text 11"/>
+          <p:cNvSpPr txBox="1"/>
+          <p:nvPr/>
+        </p:nvSpPr>
+        <p:spPr>
+          <a:xfrm>
+            <a:off x="594360" y="3118104"/>
+            <a:ext cx="548640" cy="365760"/>
+          </a:xfrm>
+          <a:prstGeom prst="rect">
+            <a:avLst/>
+          </a:prstGeom>
+          <a:noFill/>
+          <a:ln/>
+        </p:spPr>
+        <p:txBody>
+          <a:bodyPr wrap="square" lIns="0" tIns="0" rIns="0" bIns="0" rtlCol="0" anchor="ctr"/>
+          <a:lstStyle/>
+          <a:p>
+            <a:pPr algn="ctr" indent="0" marL="0">
+              <a:buNone/>
+            </a:pPr>
+            <a:r>
+              <a:rPr lang="en-US" sz="1400" b="1" dirty="0">
+                <a:solidFill>
+                  <a:schemeClr val="bg1"/>
+                </a:solidFill>
+              </a:rPr>
+              <a:t>Q7</a:t>
+            </a:r>
+            <a:endParaRPr lang="en-US" sz="1400" dirty="0"/>
+          </a:p>
+        </p:txBody>
+      </p:sp>
+      <p:sp>
+        <p:nvSpPr>
+          <p:cNvPr id="14" name="Text 12"/>
+          <p:cNvSpPr txBox="1"/>
+          <p:nvPr/>
+        </p:nvSpPr>
+        <p:spPr>
+          <a:xfrm>
+            <a:off x="1325880" y="2926080"/>
+            <a:ext cx="7223760" cy="749808"/>
+          </a:xfrm>
+          <a:prstGeom prst="rect">
+            <a:avLst/>
+          </a:prstGeom>
+          <a:noFill/>
+          <a:ln/>
+        </p:spPr>
+        <p:txBody>
+          <a:bodyPr wrap="square" lIns="0" tIns="0" rIns="0" bIns="0" rtlCol="0" anchor="ctr"/>
           <a:lstStyle/>
           <a:p>
             <a:pPr indent="0" marL="0">
@@ -3343,105 +3497,166 @@
             <a:r>
               <a:rPr lang="en-US" sz="1800" b="1" dirty="0">
                 <a:solidFill>
-                  <a:schemeClr val="tx2"/>
-                </a:solidFill>
-                <a:latin typeface="+mj-lt" pitchFamily="34" charset="0"/>
-                <a:ea typeface="+mj-lt" pitchFamily="34" charset="-122"/>
-                <a:cs typeface="+mj-lt" pitchFamily="34" charset="-120"/>
-              </a:rPr>
-              <a:t>Si da tiempo</a:t>
+                  <a:schemeClr val="tx1"/>
+                </a:solidFill>
+              </a:rPr>
+              <a:t>¿Registros OTC extensibles y quién valida?</a:t>
             </a:r>
             <a:endParaRPr lang="en-US" sz="1800" dirty="0"/>
           </a:p>
-        </p:txBody>
-      </p:sp>
-      <p:sp>
-        <p:nvSpPr>
-          <p:cNvPr id="13" name="Text 11"/>
-          <p:cNvSpPr txBox="1"/>
-          <p:nvPr/>
-        </p:nvSpPr>
-        <p:spPr>
-          <a:xfrm>
-            <a:off x="5623560" y="1737360"/>
-            <a:ext cx="2926080" cy="2651760"/>
-          </a:xfrm>
-          <a:prstGeom prst="rect">
-            <a:avLst/>
-          </a:prstGeom>
-          <a:noFill/>
-          <a:ln/>
-        </p:spPr>
-        <p:txBody>
-          <a:bodyPr wrap="square" lIns="0" tIns="0" rIns="0" bIns="0" rtlCol="0" anchor="t"/>
-          <a:lstStyle/>
-          <a:p>
-            <a:pPr indent="0" marL="0">
-              <a:spcAft>
-                <a:spcPts val="800"/>
-              </a:spcAft>
-              <a:buNone/>
-            </a:pPr>
-            <a:r>
-              <a:rPr lang="en-US" sz="1400" dirty="0">
+          <a:p>
+            <a:pPr indent="0" marL="0">
+              <a:buNone/>
+            </a:pPr>
+            <a:r>
+              <a:rPr lang="en-US" sz="1200" dirty="0">
+                <a:solidFill>
+                  <a:schemeClr val="accent4"/>
+                </a:solidFill>
+              </a:rPr>
+              <a:t>Responde: David y Sara · Regulatorio</a:t>
+            </a:r>
+            <a:endParaRPr lang="en-US" sz="1800" dirty="0"/>
+          </a:p>
+        </p:txBody>
+      </p:sp>
+      <p:sp>
+        <p:nvSpPr>
+          <p:cNvPr id="15" name="Pregunta Q8"/>
+          <p:cNvSpPr/>
+          <p:nvPr/>
+        </p:nvSpPr>
+        <p:spPr>
+          <a:xfrm>
+            <a:off x="457200" y="3794760"/>
+            <a:ext cx="8229600" cy="749808"/>
+          </a:xfrm>
+          <a:prstGeom prst="roundRect">
+            <a:avLst>
+              <a:gd name="adj" fmla="val 12195"/>
+            </a:avLst>
+          </a:prstGeom>
+          <a:solidFill>
+            <a:schemeClr val="bg2"/>
+          </a:solidFill>
+          <a:ln w="9525">
+            <a:solidFill>
+              <a:schemeClr val="accent6"/>
+            </a:solidFill>
+            <a:prstDash val="solid"/>
+          </a:ln>
+        </p:spPr>
+      </p:sp>
+      <p:sp>
+        <p:nvSpPr>
+          <p:cNvPr id="16" name="Id Q8"/>
+          <p:cNvSpPr/>
+          <p:nvPr/>
+        </p:nvSpPr>
+        <p:spPr>
+          <a:xfrm>
+            <a:off x="594360" y="3986784"/>
+            <a:ext cx="548640" cy="365760"/>
+          </a:xfrm>
+          <a:prstGeom prst="roundRect">
+            <a:avLst>
+              <a:gd name="adj" fmla="val 20000"/>
+            </a:avLst>
+          </a:prstGeom>
+          <a:solidFill>
+            <a:schemeClr val="tx1"/>
+          </a:solidFill>
+          <a:ln w="6350">
+            <a:solidFill>
+              <a:schemeClr val="tx1"/>
+            </a:solidFill>
+            <a:prstDash val="solid"/>
+          </a:ln>
+        </p:spPr>
+      </p:sp>
+      <p:sp>
+        <p:nvSpPr>
+          <p:cNvPr id="17" name="Text 15"/>
+          <p:cNvSpPr txBox="1"/>
+          <p:nvPr/>
+        </p:nvSpPr>
+        <p:spPr>
+          <a:xfrm>
+            <a:off x="594360" y="3986784"/>
+            <a:ext cx="548640" cy="365760"/>
+          </a:xfrm>
+          <a:prstGeom prst="rect">
+            <a:avLst/>
+          </a:prstGeom>
+          <a:noFill/>
+          <a:ln/>
+        </p:spPr>
+        <p:txBody>
+          <a:bodyPr wrap="square" lIns="0" tIns="0" rIns="0" bIns="0" rtlCol="0" anchor="ctr"/>
+          <a:lstStyle/>
+          <a:p>
+            <a:pPr algn="ctr" indent="0" marL="0">
+              <a:buNone/>
+            </a:pPr>
+            <a:r>
+              <a:rPr lang="en-US" sz="1400" b="1" dirty="0">
+                <a:solidFill>
+                  <a:schemeClr val="bg1"/>
+                </a:solidFill>
+              </a:rPr>
+              <a:t>Q8</a:t>
+            </a:r>
+            <a:endParaRPr lang="en-US" sz="1400" dirty="0"/>
+          </a:p>
+        </p:txBody>
+      </p:sp>
+      <p:sp>
+        <p:nvSpPr>
+          <p:cNvPr id="18" name="Text 16"/>
+          <p:cNvSpPr txBox="1"/>
+          <p:nvPr/>
+        </p:nvSpPr>
+        <p:spPr>
+          <a:xfrm>
+            <a:off x="1325880" y="3794760"/>
+            <a:ext cx="7223760" cy="749808"/>
+          </a:xfrm>
+          <a:prstGeom prst="rect">
+            <a:avLst/>
+          </a:prstGeom>
+          <a:noFill/>
+          <a:ln/>
+        </p:spPr>
+        <p:txBody>
+          <a:bodyPr wrap="square" lIns="0" tIns="0" rIns="0" bIns="0" rtlCol="0" anchor="ctr"/>
+          <a:lstStyle/>
+          <a:p>
+            <a:pPr indent="0" marL="0">
+              <a:buNone/>
+            </a:pPr>
+            <a:r>
+              <a:rPr lang="en-US" sz="1800" b="1" dirty="0">
                 <a:solidFill>
                   <a:schemeClr val="tx1"/>
                 </a:solidFill>
               </a:rPr>
-              <a:t>Q11 · ¿Quién es dueño del acelerador?</a:t>
-            </a:r>
-            <a:endParaRPr lang="en-US" sz="1400" dirty="0"/>
-          </a:p>
-          <a:p>
-            <a:pPr indent="0" marL="0">
-              <a:spcAft>
-                <a:spcPts val="800"/>
-              </a:spcAft>
-              <a:buNone/>
-            </a:pPr>
-            <a:r>
-              <a:rPr lang="en-US" sz="1400" dirty="0">
-                <a:solidFill>
-                  <a:schemeClr val="tx1"/>
-                </a:solidFill>
-              </a:rPr>
-              <a:t>Q12 · ¿Cuánta novedad absorben los canales?</a:t>
-            </a:r>
-            <a:endParaRPr lang="en-US" sz="1400" dirty="0"/>
-          </a:p>
-          <a:p>
-            <a:pPr indent="0" marL="0">
-              <a:spcAft>
-                <a:spcPts val="800"/>
-              </a:spcAft>
-              <a:buNone/>
-            </a:pPr>
-            <a:r>
-              <a:rPr lang="en-US" sz="1400" dirty="0">
-                <a:solidFill>
-                  <a:schemeClr val="tx1"/>
-                </a:solidFill>
-              </a:rPr>
-              <a:t>Q13 · ¿Exploramos suplementos para mascotas?</a:t>
-            </a:r>
-            <a:endParaRPr lang="en-US" sz="1400" dirty="0"/>
-          </a:p>
-          <a:p>
-            <a:pPr indent="0" marL="0">
-              <a:spcAft>
-                <a:spcPts val="800"/>
-              </a:spcAft>
-              <a:buNone/>
-            </a:pPr>
-            <a:r>
-              <a:rPr lang="en-US" sz="1400" dirty="0">
-                <a:solidFill>
-                  <a:schemeClr val="tx1"/>
-                </a:solidFill>
-              </a:rPr>
-              <a:t>Q14 · ¿Qué documentos y cuándo nos vemos?</a:t>
-            </a:r>
-            <a:endParaRPr lang="en-US" sz="1400" dirty="0"/>
+              <a:t>¿Cuándo un SKU se considera exitoso?</a:t>
+            </a:r>
+            <a:endParaRPr lang="en-US" sz="1800" dirty="0"/>
+          </a:p>
+          <a:p>
+            <a:pPr indent="0" marL="0">
+              <a:buNone/>
+            </a:pPr>
+            <a:r>
+              <a:rPr lang="en-US" sz="1200" dirty="0">
+                <a:solidFill>
+                  <a:schemeClr val="accent4"/>
+                </a:solidFill>
+              </a:rPr>
+              <a:t>Responde: David · Criterios</a:t>
+            </a:r>
+            <a:endParaRPr lang="en-US" sz="1800" dirty="0"/>
           </a:p>
         </p:txBody>
       </p:sp>
@@ -3485,6 +3700,550 @@
             <a:fld id="{F7021451-1387-4CA6-816F-3879F97B5CBC}" type="slidenum">
               <a:rPr b="0" lang="en-US"/>
               <a:t>11</a:t>
+            </a:fld>
+            <a:endParaRPr lang="en-US"/>
+          </a:p>
+        </p:txBody>
+      </p:sp>
+    </p:spTree>
+  </p:cSld>
+  <p:clrMapOvr>
+    <a:masterClrMapping/>
+  </p:clrMapOvr>
+</p:sld>
+</file>
+
+<file path=ppt/slides/slide12.xml><?xml version="1.0" encoding="utf-8"?>
+<p:sld xmlns:a="http://schemas.openxmlformats.org/drawingml/2006/main" xmlns:r="http://schemas.openxmlformats.org/officeDocument/2006/relationships" xmlns:p="http://schemas.openxmlformats.org/presentationml/2006/main">
+  <p:cSld name="Slide 12">
+    <p:spTree>
+      <p:nvGrpSpPr>
+        <p:cNvPr id="1" name=""/>
+        <p:cNvGrpSpPr/>
+        <p:nvPr/>
+      </p:nvGrpSpPr>
+      <p:grpSpPr>
+        <a:xfrm>
+          <a:off x="0" y="0"/>
+          <a:ext cx="0" cy="0"/>
+          <a:chOff x="0" y="0"/>
+          <a:chExt cx="0" cy="0"/>
+        </a:xfrm>
+      </p:grpSpPr>
+      <p:sp>
+        <p:nvSpPr>
+          <p:cNvPr id="2" name="Text 1"/>
+          <p:cNvSpPr/>
+          <p:nvPr>
+            <p:ph idx="101" type="title" hasCustomPrompt="1"/>
+          </p:nvPr>
+        </p:nvSpPr>
+        <p:spPr>
+          <a:xfrm>
+            <a:off x="457200" y="274320"/>
+            <a:ext cx="8229600" cy="731520"/>
+          </a:xfrm>
+          <a:prstGeom prst="rect">
+            <a:avLst/>
+          </a:prstGeom>
+          <a:noFill/>
+          <a:ln/>
+        </p:spPr>
+        <p:txBody>
+          <a:bodyPr wrap="square" lIns="0" tIns="0" rIns="0" bIns="0" rtlCol="0" anchor="ctr"/>
+          <a:lstStyle/>
+          <a:p>
+            <a:pPr algn="l" indent="0" marL="0">
+              <a:buNone/>
+            </a:pPr>
+            <a:r>
+              <a:rPr lang="en-US" sz="3200" b="1" dirty="0">
+                <a:solidFill>
+                  <a:schemeClr val="tx1"/>
+                </a:solidFill>
+              </a:rPr>
+              <a:t>Preguntas en vivo · 3 de 3</a:t>
+            </a:r>
+            <a:endParaRPr lang="en-US" sz="3200" dirty="0"/>
+          </a:p>
+        </p:txBody>
+      </p:sp>
+      <p:sp>
+        <p:nvSpPr>
+          <p:cNvPr id="3" name="Pregunta Q9"/>
+          <p:cNvSpPr/>
+          <p:nvPr/>
+        </p:nvSpPr>
+        <p:spPr>
+          <a:xfrm>
+            <a:off x="457200" y="1188720"/>
+            <a:ext cx="4754880" cy="1051560"/>
+          </a:xfrm>
+          <a:prstGeom prst="roundRect">
+            <a:avLst>
+              <a:gd name="adj" fmla="val 8696"/>
+            </a:avLst>
+          </a:prstGeom>
+          <a:solidFill>
+            <a:schemeClr val="bg2"/>
+          </a:solidFill>
+          <a:ln w="9525">
+            <a:solidFill>
+              <a:schemeClr val="accent6"/>
+            </a:solidFill>
+            <a:prstDash val="solid"/>
+          </a:ln>
+        </p:spPr>
+      </p:sp>
+      <p:sp>
+        <p:nvSpPr>
+          <p:cNvPr id="4" name="Id Q9"/>
+          <p:cNvSpPr/>
+          <p:nvPr/>
+        </p:nvSpPr>
+        <p:spPr>
+          <a:xfrm>
+            <a:off x="594360" y="1531620"/>
+            <a:ext cx="548640" cy="365760"/>
+          </a:xfrm>
+          <a:prstGeom prst="roundRect">
+            <a:avLst>
+              <a:gd name="adj" fmla="val 20000"/>
+            </a:avLst>
+          </a:prstGeom>
+          <a:solidFill>
+            <a:schemeClr val="tx1"/>
+          </a:solidFill>
+          <a:ln w="6350">
+            <a:solidFill>
+              <a:schemeClr val="tx1"/>
+            </a:solidFill>
+            <a:prstDash val="solid"/>
+          </a:ln>
+        </p:spPr>
+      </p:sp>
+      <p:sp>
+        <p:nvSpPr>
+          <p:cNvPr id="5" name="Text 3"/>
+          <p:cNvSpPr txBox="1"/>
+          <p:nvPr/>
+        </p:nvSpPr>
+        <p:spPr>
+          <a:xfrm>
+            <a:off x="594360" y="1531620"/>
+            <a:ext cx="548640" cy="365760"/>
+          </a:xfrm>
+          <a:prstGeom prst="rect">
+            <a:avLst/>
+          </a:prstGeom>
+          <a:noFill/>
+          <a:ln/>
+        </p:spPr>
+        <p:txBody>
+          <a:bodyPr wrap="square" lIns="0" tIns="0" rIns="0" bIns="0" rtlCol="0" anchor="ctr"/>
+          <a:lstStyle/>
+          <a:p>
+            <a:pPr algn="ctr" indent="0" marL="0">
+              <a:buNone/>
+            </a:pPr>
+            <a:r>
+              <a:rPr lang="en-US" sz="1400" b="1" dirty="0">
+                <a:solidFill>
+                  <a:schemeClr val="bg1"/>
+                </a:solidFill>
+              </a:rPr>
+              <a:t>Q9</a:t>
+            </a:r>
+            <a:endParaRPr lang="en-US" sz="1400" dirty="0"/>
+          </a:p>
+        </p:txBody>
+      </p:sp>
+      <p:sp>
+        <p:nvSpPr>
+          <p:cNvPr id="6" name="Text 4"/>
+          <p:cNvSpPr txBox="1"/>
+          <p:nvPr/>
+        </p:nvSpPr>
+        <p:spPr>
+          <a:xfrm>
+            <a:off x="1325880" y="1188720"/>
+            <a:ext cx="3749040" cy="1051560"/>
+          </a:xfrm>
+          <a:prstGeom prst="rect">
+            <a:avLst/>
+          </a:prstGeom>
+          <a:noFill/>
+          <a:ln/>
+        </p:spPr>
+        <p:txBody>
+          <a:bodyPr wrap="square" lIns="0" tIns="0" rIns="0" bIns="0" rtlCol="0" anchor="ctr"/>
+          <a:lstStyle/>
+          <a:p>
+            <a:pPr indent="0" marL="0">
+              <a:buNone/>
+            </a:pPr>
+            <a:r>
+              <a:rPr lang="en-US" sz="1400" b="1" dirty="0">
+                <a:solidFill>
+                  <a:schemeClr val="tx1"/>
+                </a:solidFill>
+              </a:rPr>
+              <a:t>¿Hay techo para el Presupuesto 2027?</a:t>
+            </a:r>
+            <a:endParaRPr lang="en-US" sz="1400" dirty="0"/>
+          </a:p>
+          <a:p>
+            <a:pPr indent="0" marL="0">
+              <a:buNone/>
+            </a:pPr>
+            <a:r>
+              <a:rPr lang="en-US" sz="1200" dirty="0">
+                <a:solidFill>
+                  <a:schemeClr val="accent4"/>
+                </a:solidFill>
+              </a:rPr>
+              <a:t>Responde: David</a:t>
+            </a:r>
+            <a:endParaRPr lang="en-US" sz="1400" dirty="0"/>
+          </a:p>
+        </p:txBody>
+      </p:sp>
+      <p:sp>
+        <p:nvSpPr>
+          <p:cNvPr id="7" name="Pregunta Q10"/>
+          <p:cNvSpPr/>
+          <p:nvPr/>
+        </p:nvSpPr>
+        <p:spPr>
+          <a:xfrm>
+            <a:off x="457200" y="2377440"/>
+            <a:ext cx="4754880" cy="1051560"/>
+          </a:xfrm>
+          <a:prstGeom prst="roundRect">
+            <a:avLst>
+              <a:gd name="adj" fmla="val 8696"/>
+            </a:avLst>
+          </a:prstGeom>
+          <a:solidFill>
+            <a:schemeClr val="bg2"/>
+          </a:solidFill>
+          <a:ln w="9525">
+            <a:solidFill>
+              <a:schemeClr val="accent6"/>
+            </a:solidFill>
+            <a:prstDash val="solid"/>
+          </a:ln>
+        </p:spPr>
+      </p:sp>
+      <p:sp>
+        <p:nvSpPr>
+          <p:cNvPr id="8" name="Id Q10"/>
+          <p:cNvSpPr/>
+          <p:nvPr/>
+        </p:nvSpPr>
+        <p:spPr>
+          <a:xfrm>
+            <a:off x="594360" y="2720340"/>
+            <a:ext cx="548640" cy="365760"/>
+          </a:xfrm>
+          <a:prstGeom prst="roundRect">
+            <a:avLst>
+              <a:gd name="adj" fmla="val 20000"/>
+            </a:avLst>
+          </a:prstGeom>
+          <a:solidFill>
+            <a:schemeClr val="tx1"/>
+          </a:solidFill>
+          <a:ln w="6350">
+            <a:solidFill>
+              <a:schemeClr val="tx1"/>
+            </a:solidFill>
+            <a:prstDash val="solid"/>
+          </a:ln>
+        </p:spPr>
+      </p:sp>
+      <p:sp>
+        <p:nvSpPr>
+          <p:cNvPr id="9" name="Text 7"/>
+          <p:cNvSpPr txBox="1"/>
+          <p:nvPr/>
+        </p:nvSpPr>
+        <p:spPr>
+          <a:xfrm>
+            <a:off x="594360" y="2720340"/>
+            <a:ext cx="548640" cy="365760"/>
+          </a:xfrm>
+          <a:prstGeom prst="rect">
+            <a:avLst/>
+          </a:prstGeom>
+          <a:noFill/>
+          <a:ln/>
+        </p:spPr>
+        <p:txBody>
+          <a:bodyPr wrap="square" lIns="0" tIns="0" rIns="0" bIns="0" rtlCol="0" anchor="ctr"/>
+          <a:lstStyle/>
+          <a:p>
+            <a:pPr algn="ctr" indent="0" marL="0">
+              <a:buNone/>
+            </a:pPr>
+            <a:r>
+              <a:rPr lang="en-US" sz="1400" b="1" dirty="0">
+                <a:solidFill>
+                  <a:schemeClr val="bg1"/>
+                </a:solidFill>
+              </a:rPr>
+              <a:t>Q10</a:t>
+            </a:r>
+            <a:endParaRPr lang="en-US" sz="1400" dirty="0"/>
+          </a:p>
+        </p:txBody>
+      </p:sp>
+      <p:sp>
+        <p:nvSpPr>
+          <p:cNvPr id="10" name="Text 8"/>
+          <p:cNvSpPr txBox="1"/>
+          <p:nvPr/>
+        </p:nvSpPr>
+        <p:spPr>
+          <a:xfrm>
+            <a:off x="1325880" y="2377440"/>
+            <a:ext cx="3749040" cy="1051560"/>
+          </a:xfrm>
+          <a:prstGeom prst="rect">
+            <a:avLst/>
+          </a:prstGeom>
+          <a:noFill/>
+          <a:ln/>
+        </p:spPr>
+        <p:txBody>
+          <a:bodyPr wrap="square" lIns="0" tIns="0" rIns="0" bIns="0" rtlCol="0" anchor="ctr"/>
+          <a:lstStyle/>
+          <a:p>
+            <a:pPr indent="0" marL="0">
+              <a:buNone/>
+            </a:pPr>
+            <a:r>
+              <a:rPr lang="en-US" sz="1400" b="1" dirty="0">
+                <a:solidFill>
+                  <a:schemeClr val="tx1"/>
+                </a:solidFill>
+              </a:rPr>
+              <a:t>¿Autoriza el Project compartido y las reglas de datos?</a:t>
+            </a:r>
+            <a:endParaRPr lang="en-US" sz="1400" dirty="0"/>
+          </a:p>
+          <a:p>
+            <a:pPr indent="0" marL="0">
+              <a:buNone/>
+            </a:pPr>
+            <a:r>
+              <a:rPr lang="en-US" sz="1200" dirty="0">
+                <a:solidFill>
+                  <a:schemeClr val="accent4"/>
+                </a:solidFill>
+              </a:rPr>
+              <a:t>Responde: David</a:t>
+            </a:r>
+            <a:endParaRPr lang="en-US" sz="1400" dirty="0"/>
+          </a:p>
+        </p:txBody>
+      </p:sp>
+      <p:sp>
+        <p:nvSpPr>
+          <p:cNvPr id="11" name="Si da tiempo"/>
+          <p:cNvSpPr/>
+          <p:nvPr/>
+        </p:nvSpPr>
+        <p:spPr>
+          <a:xfrm>
+            <a:off x="5440680" y="1188720"/>
+            <a:ext cx="3246120" cy="3337560"/>
+          </a:xfrm>
+          <a:prstGeom prst="roundRect">
+            <a:avLst>
+              <a:gd name="adj" fmla="val 3380"/>
+            </a:avLst>
+          </a:prstGeom>
+          <a:solidFill>
+            <a:schemeClr val="bg2"/>
+          </a:solidFill>
+          <a:ln w="9525">
+            <a:solidFill>
+              <a:schemeClr val="accent6"/>
+            </a:solidFill>
+            <a:prstDash val="solid"/>
+          </a:ln>
+        </p:spPr>
+      </p:sp>
+      <p:sp>
+        <p:nvSpPr>
+          <p:cNvPr id="12" name="Text 10"/>
+          <p:cNvSpPr txBox="1"/>
+          <p:nvPr/>
+        </p:nvSpPr>
+        <p:spPr>
+          <a:xfrm>
+            <a:off x="5623560" y="1298448"/>
+            <a:ext cx="2926080" cy="320040"/>
+          </a:xfrm>
+          <a:prstGeom prst="rect">
+            <a:avLst/>
+          </a:prstGeom>
+          <a:noFill/>
+          <a:ln/>
+        </p:spPr>
+        <p:txBody>
+          <a:bodyPr wrap="square" lIns="0" tIns="0" rIns="0" bIns="0" rtlCol="0" anchor="t"/>
+          <a:lstStyle/>
+          <a:p>
+            <a:pPr indent="0" marL="0">
+              <a:buNone/>
+            </a:pPr>
+            <a:r>
+              <a:rPr lang="en-US" sz="1800" b="1" dirty="0">
+                <a:solidFill>
+                  <a:schemeClr val="tx2"/>
+                </a:solidFill>
+                <a:latin typeface="+mj-lt" pitchFamily="34" charset="0"/>
+                <a:ea typeface="+mj-lt" pitchFamily="34" charset="-122"/>
+                <a:cs typeface="+mj-lt" pitchFamily="34" charset="-120"/>
+              </a:rPr>
+              <a:t>Si da tiempo</a:t>
+            </a:r>
+            <a:endParaRPr lang="en-US" sz="1800" dirty="0"/>
+          </a:p>
+        </p:txBody>
+      </p:sp>
+      <p:sp>
+        <p:nvSpPr>
+          <p:cNvPr id="13" name="Text 11"/>
+          <p:cNvSpPr txBox="1"/>
+          <p:nvPr/>
+        </p:nvSpPr>
+        <p:spPr>
+          <a:xfrm>
+            <a:off x="5623560" y="1737360"/>
+            <a:ext cx="2926080" cy="2651760"/>
+          </a:xfrm>
+          <a:prstGeom prst="rect">
+            <a:avLst/>
+          </a:prstGeom>
+          <a:noFill/>
+          <a:ln/>
+        </p:spPr>
+        <p:txBody>
+          <a:bodyPr wrap="square" lIns="0" tIns="0" rIns="0" bIns="0" rtlCol="0" anchor="t"/>
+          <a:lstStyle/>
+          <a:p>
+            <a:pPr indent="0" marL="0">
+              <a:spcAft>
+                <a:spcPts val="800"/>
+              </a:spcAft>
+              <a:buNone/>
+            </a:pPr>
+            <a:r>
+              <a:rPr lang="en-US" sz="1400" dirty="0">
+                <a:solidFill>
+                  <a:schemeClr val="tx1"/>
+                </a:solidFill>
+              </a:rPr>
+              <a:t>Q11 · ¿Quién es dueño del acelerador?</a:t>
+            </a:r>
+            <a:endParaRPr lang="en-US" sz="1400" dirty="0"/>
+          </a:p>
+          <a:p>
+            <a:pPr indent="0" marL="0">
+              <a:spcAft>
+                <a:spcPts val="800"/>
+              </a:spcAft>
+              <a:buNone/>
+            </a:pPr>
+            <a:r>
+              <a:rPr lang="en-US" sz="1400" dirty="0">
+                <a:solidFill>
+                  <a:schemeClr val="tx1"/>
+                </a:solidFill>
+              </a:rPr>
+              <a:t>Q12 · ¿Cuánta novedad absorben los canales?</a:t>
+            </a:r>
+            <a:endParaRPr lang="en-US" sz="1400" dirty="0"/>
+          </a:p>
+          <a:p>
+            <a:pPr indent="0" marL="0">
+              <a:spcAft>
+                <a:spcPts val="800"/>
+              </a:spcAft>
+              <a:buNone/>
+            </a:pPr>
+            <a:r>
+              <a:rPr lang="en-US" sz="1400" dirty="0">
+                <a:solidFill>
+                  <a:schemeClr val="tx1"/>
+                </a:solidFill>
+              </a:rPr>
+              <a:t>Q13 · ¿Exploramos suplementos para mascotas?</a:t>
+            </a:r>
+            <a:endParaRPr lang="en-US" sz="1400" dirty="0"/>
+          </a:p>
+          <a:p>
+            <a:pPr indent="0" marL="0">
+              <a:spcAft>
+                <a:spcPts val="800"/>
+              </a:spcAft>
+              <a:buNone/>
+            </a:pPr>
+            <a:r>
+              <a:rPr lang="en-US" sz="1400" dirty="0">
+                <a:solidFill>
+                  <a:schemeClr val="tx1"/>
+                </a:solidFill>
+              </a:rPr>
+              <a:t>Q14 · ¿Qué documentos y cuándo nos vemos?</a:t>
+            </a:r>
+            <a:endParaRPr lang="en-US" sz="1400" dirty="0"/>
+          </a:p>
+        </p:txBody>
+      </p:sp>
+      <p:sp>
+        <p:nvSpPr>
+          <p:cNvPr id="25" name="Slide Number Placeholder 0"/>
+          <p:cNvSpPr>
+            <a:spLocks noGrp="1"/>
+          </p:cNvSpPr>
+          <p:nvPr>
+            <p:ph type="sldNum" sz="quarter" idx="4294967295"/>
+          </p:nvPr>
+        </p:nvSpPr>
+        <p:spPr>
+          <a:xfrm>
+            <a:off x="8321040" y="4773168"/>
+            <a:ext cx="365760" cy="228600"/>
+          </a:xfrm>
+          <a:prstGeom prst="rect">
+            <a:avLst/>
+          </a:prstGeom>
+          <a:extLst>
+            <a:ext uri="{C572A759-6A51-4108-AA02-DFA0A04FC94B}">
+              <ma14:wrappingTextBoxFlag xmlns:ma14="http://schemas.microsoft.com/office/mac/drawingml/2011/main" val="0"/>
+            </a:ext>
+          </a:extLst>
+        </p:spPr>
+        <p:txBody>
+          <a:bodyPr/>
+          <a:lstStyle>
+            <a:lvl1pPr>
+              <a:defRPr sz="1000">
+                <a:solidFill>
+                  <a:schemeClr val="accent4"/>
+                </a:solidFill>
+              </a:defRPr>
+            </a:lvl1pPr>
+          </a:lstStyle>
+          <a:p>
+            <a:pPr algn="r"/>
+            <a:fld id="{F7021451-1387-4CA6-816F-3879F97B5CBC}" type="slidenum">
+              <a:rPr b="0" lang="en-US"/>
+              <a:t>12</a:t>
             </a:fld>
             <a:endParaRPr lang="en-US"/>
           </a:p>
@@ -3562,7 +4321,7 @@
         <p:spPr>
           <a:xfrm>
             <a:off x="457200" y="1234440"/>
-            <a:ext cx="1920240" cy="2377440"/>
+            <a:ext cx="1920240" cy="2514600"/>
           </a:xfrm>
           <a:prstGeom prst="roundRect">
             <a:avLst>
@@ -3628,7 +4387,7 @@
         <p:spPr>
           <a:xfrm>
             <a:off x="594360" y="2194560"/>
-            <a:ext cx="1645920" cy="1371600"/>
+            <a:ext cx="1645920" cy="1463040"/>
           </a:xfrm>
           <a:prstGeom prst="rect">
             <a:avLst/>
@@ -3649,7 +4408,7 @@
                   <a:schemeClr val="tx1"/>
                 </a:solidFill>
               </a:rPr>
-              <a:t>productos publicados hoy en daclaf.com (34 individuales + 9 kits)</a:t>
+              <a:t>productos publicados en daclaf.com (34 + 9 kits); en la reunión se habló de ~50 SKUs</a:t>
             </a:r>
             <a:endParaRPr lang="en-US" sz="1400" dirty="0"/>
           </a:p>
@@ -3664,7 +4423,7 @@
         <p:spPr>
           <a:xfrm>
             <a:off x="2560320" y="1234440"/>
-            <a:ext cx="1920240" cy="2377440"/>
+            <a:ext cx="1920240" cy="2514600"/>
           </a:xfrm>
           <a:prstGeom prst="roundRect">
             <a:avLst>
@@ -3730,7 +4489,7 @@
         <p:spPr>
           <a:xfrm>
             <a:off x="2697480" y="2194560"/>
-            <a:ext cx="1645920" cy="1371600"/>
+            <a:ext cx="1645920" cy="1463040"/>
           </a:xfrm>
           <a:prstGeom prst="rect">
             <a:avLst/>
@@ -3766,7 +4525,7 @@
         <p:spPr>
           <a:xfrm>
             <a:off x="4663440" y="1234440"/>
-            <a:ext cx="1920240" cy="2377440"/>
+            <a:ext cx="1920240" cy="2514600"/>
           </a:xfrm>
           <a:prstGeom prst="roundRect">
             <a:avLst>
@@ -3832,7 +4591,7 @@
         <p:spPr>
           <a:xfrm>
             <a:off x="4800600" y="2194560"/>
-            <a:ext cx="1645920" cy="1371600"/>
+            <a:ext cx="1645920" cy="1463040"/>
           </a:xfrm>
           <a:prstGeom prst="rect">
             <a:avLst/>
@@ -3868,7 +4627,7 @@
         <p:spPr>
           <a:xfrm>
             <a:off x="6766560" y="1234440"/>
-            <a:ext cx="1920240" cy="2377440"/>
+            <a:ext cx="1920240" cy="2514600"/>
           </a:xfrm>
           <a:prstGeom prst="roundRect">
             <a:avLst>
@@ -3934,7 +4693,7 @@
         <p:spPr>
           <a:xfrm>
             <a:off x="6903720" y="2194560"/>
-            <a:ext cx="1645920" cy="1371600"/>
+            <a:ext cx="1645920" cy="1463040"/>
           </a:xfrm>
           <a:prstGeom prst="rect">
             <a:avLst/>
@@ -3969,7 +4728,7 @@
         </p:nvSpPr>
         <p:spPr>
           <a:xfrm>
-            <a:off x="457200" y="3931920"/>
+            <a:off x="457200" y="3977640"/>
             <a:ext cx="8229600" cy="457200"/>
           </a:xfrm>
           <a:prstGeom prst="rect">
@@ -6964,7 +7723,7 @@
         <p:spPr>
           <a:xfrm>
             <a:off x="457200" y="1188720"/>
-            <a:ext cx="2651760" cy="2880360"/>
+            <a:ext cx="2651760" cy="2834640"/>
           </a:xfrm>
           <a:prstGeom prst="roundRect">
             <a:avLst>
@@ -7205,7 +7964,7 @@
         <p:spPr>
           <a:xfrm>
             <a:off x="3291840" y="1188720"/>
-            <a:ext cx="2651760" cy="2880360"/>
+            <a:ext cx="2651760" cy="2834640"/>
           </a:xfrm>
           <a:prstGeom prst="roundRect">
             <a:avLst>
@@ -7428,7 +8187,7 @@
         <p:spPr>
           <a:xfrm>
             <a:off x="6126480" y="1188720"/>
-            <a:ext cx="2651760" cy="2880360"/>
+            <a:ext cx="2651760" cy="2834640"/>
           </a:xfrm>
           <a:prstGeom prst="roundRect">
             <a:avLst>
@@ -7668,8 +8427,8 @@
         </p:nvSpPr>
         <p:spPr>
           <a:xfrm>
-            <a:off x="457200" y="4251960"/>
-            <a:ext cx="8229600" cy="365760"/>
+            <a:off x="457200" y="4160520"/>
+            <a:ext cx="8229600" cy="502920"/>
           </a:xfrm>
           <a:prstGeom prst="rect">
             <a:avLst/>
@@ -7690,7 +8449,7 @@
                   <a:schemeClr val="tx1"/>
                 </a:solidFill>
               </a:rPr>
-              <a:t>Regla mínima propuesta: a herramientas externas solo va información pública o anonimizada (pregunta 10).</a:t>
+              <a:t>Regla R5: a herramientas externas va únicamente información pública o anonimizada. Nunca se pegan exports de NetSuite en chats públicos (pregunta 10).</a:t>
             </a:r>
             <a:endParaRPr lang="en-US" sz="1400" dirty="0"/>
           </a:p>
@@ -7798,7 +8557,7 @@
                   <a:schemeClr val="tx1"/>
                 </a:solidFill>
               </a:rPr>
-              <a:t>Ruta al 18 de diciembre</a:t>
+              <a:t>Cada dato lleva su nivel de confianza</a:t>
             </a:r>
             <a:endParaRPr lang="en-US" sz="3200" dirty="0"/>
           </a:p>
@@ -7806,20 +8565,24 @@
       </p:sp>
       <p:sp>
         <p:nvSpPr>
-          <p:cNvPr id="3" name="Linea de tiempo"/>
+          <p:cNvPr id="3" name="Confianza A"/>
           <p:cNvSpPr/>
           <p:nvPr/>
         </p:nvSpPr>
         <p:spPr>
           <a:xfrm>
-            <a:off x="685800" y="2423160"/>
-            <a:ext cx="7772400" cy="0"/>
-          </a:xfrm>
-          <a:prstGeom prst="line">
-            <a:avLst/>
-          </a:prstGeom>
-          <a:noFill/>
-          <a:ln w="25400">
+            <a:off x="457200" y="1188720"/>
+            <a:ext cx="2651760" cy="2514600"/>
+          </a:xfrm>
+          <a:prstGeom prst="roundRect">
+            <a:avLst>
+              <a:gd name="adj" fmla="val 4364"/>
+            </a:avLst>
+          </a:prstGeom>
+          <a:solidFill>
+            <a:schemeClr val="bg2"/>
+          </a:solidFill>
+          <a:ln w="9525">
             <a:solidFill>
               <a:schemeClr val="accent6"/>
             </a:solidFill>
@@ -7829,14 +8592,78 @@
       </p:sp>
       <p:sp>
         <p:nvSpPr>
-          <p:cNvPr id="4" name="Text 2"/>
-          <p:cNvSpPr txBox="1"/>
-          <p:nvPr/>
-        </p:nvSpPr>
-        <p:spPr>
-          <a:xfrm>
-            <a:off x="457200" y="1737360"/>
-            <a:ext cx="1325880" cy="457200"/>
+          <p:cNvPr id="4" name="Letra A"/>
+          <p:cNvSpPr/>
+          <p:nvPr/>
+        </p:nvSpPr>
+        <p:spPr>
+          <a:xfrm>
+            <a:off x="640080" y="1371600"/>
+            <a:ext cx="640080" cy="640080"/>
+          </a:xfrm>
+          <a:prstGeom prst="ellipse">
+            <a:avLst/>
+          </a:prstGeom>
+          <a:solidFill>
+            <a:schemeClr val="accent2"/>
+          </a:solidFill>
+          <a:ln w="6350">
+            <a:solidFill>
+              <a:schemeClr val="accent2"/>
+            </a:solidFill>
+            <a:prstDash val="solid"/>
+          </a:ln>
+        </p:spPr>
+      </p:sp>
+      <p:sp>
+        <p:nvSpPr>
+          <p:cNvPr id="5" name="Text 3"/>
+          <p:cNvSpPr txBox="1"/>
+          <p:nvPr/>
+        </p:nvSpPr>
+        <p:spPr>
+          <a:xfrm>
+            <a:off x="640080" y="1371600"/>
+            <a:ext cx="640080" cy="640080"/>
+          </a:xfrm>
+          <a:prstGeom prst="rect">
+            <a:avLst/>
+          </a:prstGeom>
+          <a:noFill/>
+          <a:ln/>
+        </p:spPr>
+        <p:txBody>
+          <a:bodyPr wrap="square" lIns="0" tIns="0" rIns="0" bIns="0" rtlCol="0" anchor="ctr"/>
+          <a:lstStyle/>
+          <a:p>
+            <a:pPr algn="ctr" indent="0" marL="0">
+              <a:buNone/>
+            </a:pPr>
+            <a:r>
+              <a:rPr lang="en-US" sz="2400" b="1" dirty="0">
+                <a:solidFill>
+                  <a:schemeClr val="bg1"/>
+                </a:solidFill>
+                <a:latin typeface="+mj-lt" pitchFamily="34" charset="0"/>
+                <a:ea typeface="+mj-lt" pitchFamily="34" charset="-122"/>
+                <a:cs typeface="+mj-lt" pitchFamily="34" charset="-120"/>
+              </a:rPr>
+              <a:t>A</a:t>
+            </a:r>
+            <a:endParaRPr lang="en-US" sz="2400" dirty="0"/>
+          </a:p>
+        </p:txBody>
+      </p:sp>
+      <p:sp>
+        <p:nvSpPr>
+          <p:cNvPr id="6" name="Text 4"/>
+          <p:cNvSpPr txBox="1"/>
+          <p:nvPr/>
+        </p:nvSpPr>
+        <p:spPr>
+          <a:xfrm>
+            <a:off x="640080" y="2194560"/>
+            <a:ext cx="2286000" cy="822960"/>
           </a:xfrm>
           <a:prstGeom prst="rect">
             <a:avLst/>
@@ -7848,16 +8675,52 @@
           <a:bodyPr wrap="square" lIns="0" tIns="0" rIns="0" bIns="0" rtlCol="0" anchor="t"/>
           <a:lstStyle/>
           <a:p>
-            <a:pPr algn="ctr" indent="0" marL="0">
-              <a:buNone/>
-            </a:pPr>
-            <a:r>
-              <a:rPr lang="en-US" sz="1400" b="1" dirty="0">
+            <a:pPr indent="0" marL="0">
+              <a:buNone/>
+            </a:pPr>
+            <a:r>
+              <a:rPr lang="en-US" sz="1600" b="1" dirty="0">
                 <a:solidFill>
                   <a:schemeClr val="tx1"/>
                 </a:solidFill>
               </a:rPr>
-              <a:t>28 oct</a:t>
+              <a:t>Fuente primaria o dos fuentes independientes</a:t>
+            </a:r>
+            <a:endParaRPr lang="en-US" sz="1600" dirty="0"/>
+          </a:p>
+        </p:txBody>
+      </p:sp>
+      <p:sp>
+        <p:nvSpPr>
+          <p:cNvPr id="7" name="Text 5"/>
+          <p:cNvSpPr txBox="1"/>
+          <p:nvPr/>
+        </p:nvSpPr>
+        <p:spPr>
+          <a:xfrm>
+            <a:off x="640080" y="3017520"/>
+            <a:ext cx="2286000" cy="548640"/>
+          </a:xfrm>
+          <a:prstGeom prst="rect">
+            <a:avLst/>
+          </a:prstGeom>
+          <a:noFill/>
+          <a:ln/>
+        </p:spPr>
+        <p:txBody>
+          <a:bodyPr wrap="square" lIns="0" tIns="0" rIns="0" bIns="0" rtlCol="0" anchor="t"/>
+          <a:lstStyle/>
+          <a:p>
+            <a:pPr indent="0" marL="0">
+              <a:buNone/>
+            </a:pPr>
+            <a:r>
+              <a:rPr lang="en-US" sz="1400" dirty="0">
+                <a:solidFill>
+                  <a:schemeClr val="tx2"/>
+                </a:solidFill>
+              </a:rPr>
+              <a:t>Puede sustentar una decisión</a:t>
             </a:r>
             <a:endParaRPr lang="en-US" sz="1400" dirty="0"/>
           </a:p>
@@ -7865,14 +8728,41 @@
       </p:sp>
       <p:sp>
         <p:nvSpPr>
-          <p:cNvPr id="5" name="Hito 28 oct"/>
+          <p:cNvPr id="8" name="Confianza B"/>
           <p:cNvSpPr/>
           <p:nvPr/>
         </p:nvSpPr>
         <p:spPr>
           <a:xfrm>
-            <a:off x="1014984" y="2295144"/>
-            <a:ext cx="256032" cy="256032"/>
+            <a:off x="3291840" y="1188720"/>
+            <a:ext cx="2651760" cy="2514600"/>
+          </a:xfrm>
+          <a:prstGeom prst="roundRect">
+            <a:avLst>
+              <a:gd name="adj" fmla="val 4364"/>
+            </a:avLst>
+          </a:prstGeom>
+          <a:solidFill>
+            <a:schemeClr val="bg2"/>
+          </a:solidFill>
+          <a:ln w="9525">
+            <a:solidFill>
+              <a:schemeClr val="accent6"/>
+            </a:solidFill>
+            <a:prstDash val="solid"/>
+          </a:ln>
+        </p:spPr>
+      </p:sp>
+      <p:sp>
+        <p:nvSpPr>
+          <p:cNvPr id="9" name="Letra B"/>
+          <p:cNvSpPr/>
+          <p:nvPr/>
+        </p:nvSpPr>
+        <p:spPr>
+          <a:xfrm>
+            <a:off x="3474720" y="1371600"/>
+            <a:ext cx="640080" cy="640080"/>
           </a:xfrm>
           <a:prstGeom prst="ellipse">
             <a:avLst/>
@@ -7880,9 +8770,9 @@
           <a:solidFill>
             <a:schemeClr val="accent1"/>
           </a:solidFill>
-          <a:ln w="25400">
+          <a:ln w="6350">
             <a:solidFill>
-              <a:schemeClr val="bg1"/>
+              <a:schemeClr val="accent1"/>
             </a:solidFill>
             <a:prstDash val="solid"/>
           </a:ln>
@@ -7890,14 +8780,53 @@
       </p:sp>
       <p:sp>
         <p:nvSpPr>
-          <p:cNvPr id="6" name="Text 4"/>
-          <p:cNvSpPr txBox="1"/>
-          <p:nvPr/>
-        </p:nvSpPr>
-        <p:spPr>
-          <a:xfrm>
-            <a:off x="457200" y="2788920"/>
-            <a:ext cx="1325880" cy="548640"/>
+          <p:cNvPr id="10" name="Text 8"/>
+          <p:cNvSpPr txBox="1"/>
+          <p:nvPr/>
+        </p:nvSpPr>
+        <p:spPr>
+          <a:xfrm>
+            <a:off x="3474720" y="1371600"/>
+            <a:ext cx="640080" cy="640080"/>
+          </a:xfrm>
+          <a:prstGeom prst="rect">
+            <a:avLst/>
+          </a:prstGeom>
+          <a:noFill/>
+          <a:ln/>
+        </p:spPr>
+        <p:txBody>
+          <a:bodyPr wrap="square" lIns="0" tIns="0" rIns="0" bIns="0" rtlCol="0" anchor="ctr"/>
+          <a:lstStyle/>
+          <a:p>
+            <a:pPr algn="ctr" indent="0" marL="0">
+              <a:buNone/>
+            </a:pPr>
+            <a:r>
+              <a:rPr lang="en-US" sz="2400" b="1" dirty="0">
+                <a:solidFill>
+                  <a:schemeClr val="tx1"/>
+                </a:solidFill>
+                <a:latin typeface="+mj-lt" pitchFamily="34" charset="0"/>
+                <a:ea typeface="+mj-lt" pitchFamily="34" charset="-122"/>
+                <a:cs typeface="+mj-lt" pitchFamily="34" charset="-120"/>
+              </a:rPr>
+              <a:t>B</a:t>
+            </a:r>
+            <a:endParaRPr lang="en-US" sz="2400" dirty="0"/>
+          </a:p>
+        </p:txBody>
+      </p:sp>
+      <p:sp>
+        <p:nvSpPr>
+          <p:cNvPr id="11" name="Text 9"/>
+          <p:cNvSpPr txBox="1"/>
+          <p:nvPr/>
+        </p:nvSpPr>
+        <p:spPr>
+          <a:xfrm>
+            <a:off x="3474720" y="2194560"/>
+            <a:ext cx="2286000" cy="822960"/>
           </a:xfrm>
           <a:prstGeom prst="rect">
             <a:avLst/>
@@ -7909,16 +8838,52 @@
           <a:bodyPr wrap="square" lIns="0" tIns="0" rIns="0" bIns="0" rtlCol="0" anchor="t"/>
           <a:lstStyle/>
           <a:p>
-            <a:pPr algn="ctr" indent="0" marL="0">
-              <a:buNone/>
-            </a:pPr>
-            <a:r>
-              <a:rPr lang="en-US" sz="1400" b="1" dirty="0">
+            <a:pPr indent="0" marL="0">
+              <a:buNone/>
+            </a:pPr>
+            <a:r>
+              <a:rPr lang="en-US" sz="1600" b="1" dirty="0">
                 <a:solidFill>
                   <a:schemeClr val="tx1"/>
                 </a:solidFill>
               </a:rPr>
-              <a:t>Sesión de arranque</a:t>
+              <a:t>Una fuente secundaria sólida</a:t>
+            </a:r>
+            <a:endParaRPr lang="en-US" sz="1600" dirty="0"/>
+          </a:p>
+        </p:txBody>
+      </p:sp>
+      <p:sp>
+        <p:nvSpPr>
+          <p:cNvPr id="12" name="Text 10"/>
+          <p:cNvSpPr txBox="1"/>
+          <p:nvPr/>
+        </p:nvSpPr>
+        <p:spPr>
+          <a:xfrm>
+            <a:off x="3474720" y="3017520"/>
+            <a:ext cx="2286000" cy="548640"/>
+          </a:xfrm>
+          <a:prstGeom prst="rect">
+            <a:avLst/>
+          </a:prstGeom>
+          <a:noFill/>
+          <a:ln/>
+        </p:spPr>
+        <p:txBody>
+          <a:bodyPr wrap="square" lIns="0" tIns="0" rIns="0" bIns="0" rtlCol="0" anchor="t"/>
+          <a:lstStyle/>
+          <a:p>
+            <a:pPr indent="0" marL="0">
+              <a:buNone/>
+            </a:pPr>
+            <a:r>
+              <a:rPr lang="en-US" sz="1400" dirty="0">
+                <a:solidFill>
+                  <a:schemeClr val="tx2"/>
+                </a:solidFill>
+              </a:rPr>
+              <a:t>Puede sustentar una decisión</a:t>
             </a:r>
             <a:endParaRPr lang="en-US" sz="1400" dirty="0"/>
           </a:p>
@@ -7926,96 +8891,26 @@
       </p:sp>
       <p:sp>
         <p:nvSpPr>
-          <p:cNvPr id="7" name="Text 5"/>
-          <p:cNvSpPr txBox="1"/>
-          <p:nvPr/>
-        </p:nvSpPr>
-        <p:spPr>
-          <a:xfrm>
-            <a:off x="457200" y="3429000"/>
-            <a:ext cx="1325880" cy="1188720"/>
-          </a:xfrm>
-          <a:prstGeom prst="rect">
-            <a:avLst/>
-          </a:prstGeom>
-          <a:noFill/>
-          <a:ln/>
-        </p:spPr>
-        <p:txBody>
-          <a:bodyPr wrap="square" lIns="0" tIns="0" rIns="0" bIns="0" rtlCol="0" anchor="t"/>
-          <a:lstStyle/>
-          <a:p>
-            <a:pPr algn="ctr" indent="0" marL="0">
-              <a:buNone/>
-            </a:pPr>
-            <a:r>
-              <a:rPr lang="en-US" sz="1200" dirty="0">
-                <a:solidFill>
-                  <a:schemeClr val="accent4"/>
-                </a:solidFill>
-              </a:rPr>
-              <a:t>Decisiones y respuestas de hoy</a:t>
-            </a:r>
-            <a:endParaRPr lang="en-US" sz="1200" dirty="0"/>
-          </a:p>
-        </p:txBody>
-      </p:sp>
-      <p:sp>
-        <p:nvSpPr>
-          <p:cNvPr id="8" name="Text 6"/>
-          <p:cNvSpPr txBox="1"/>
-          <p:nvPr/>
-        </p:nvSpPr>
-        <p:spPr>
-          <a:xfrm>
-            <a:off x="1847088" y="1737360"/>
-            <a:ext cx="1325880" cy="457200"/>
-          </a:xfrm>
-          <a:prstGeom prst="rect">
-            <a:avLst/>
-          </a:prstGeom>
-          <a:noFill/>
-          <a:ln/>
-        </p:spPr>
-        <p:txBody>
-          <a:bodyPr wrap="square" lIns="0" tIns="0" rIns="0" bIns="0" rtlCol="0" anchor="t"/>
-          <a:lstStyle/>
-          <a:p>
-            <a:pPr algn="ctr" indent="0" marL="0">
-              <a:buNone/>
-            </a:pPr>
-            <a:r>
-              <a:rPr lang="en-US" sz="1400" b="1" dirty="0">
-                <a:solidFill>
-                  <a:schemeClr val="tx1"/>
-                </a:solidFill>
-              </a:rPr>
-              <a:t>29–31 oct</a:t>
-            </a:r>
-            <a:endParaRPr lang="en-US" sz="1400" dirty="0"/>
-          </a:p>
-        </p:txBody>
-      </p:sp>
-      <p:sp>
-        <p:nvSpPr>
-          <p:cNvPr id="9" name="Hito 29–31 oct"/>
+          <p:cNvPr id="13" name="Confianza C"/>
           <p:cNvSpPr/>
           <p:nvPr/>
         </p:nvSpPr>
         <p:spPr>
           <a:xfrm>
-            <a:off x="2404872" y="2295144"/>
-            <a:ext cx="256032" cy="256032"/>
-          </a:xfrm>
-          <a:prstGeom prst="ellipse">
-            <a:avLst/>
+            <a:off x="6126480" y="1188720"/>
+            <a:ext cx="2651760" cy="2514600"/>
+          </a:xfrm>
+          <a:prstGeom prst="roundRect">
+            <a:avLst>
+              <a:gd name="adj" fmla="val 4364"/>
+            </a:avLst>
           </a:prstGeom>
           <a:solidFill>
-            <a:schemeClr val="accent2"/>
+            <a:schemeClr val="bg2"/>
           </a:solidFill>
-          <a:ln w="25400">
+          <a:ln w="9525">
             <a:solidFill>
-              <a:schemeClr val="bg1"/>
+              <a:schemeClr val="accent6"/>
             </a:solidFill>
             <a:prstDash val="solid"/>
           </a:ln>
@@ -8023,132 +8918,24 @@
       </p:sp>
       <p:sp>
         <p:nvSpPr>
-          <p:cNvPr id="10" name="Text 8"/>
-          <p:cNvSpPr txBox="1"/>
-          <p:nvPr/>
-        </p:nvSpPr>
-        <p:spPr>
-          <a:xfrm>
-            <a:off x="1847088" y="2788920"/>
-            <a:ext cx="1325880" cy="548640"/>
-          </a:xfrm>
-          <a:prstGeom prst="rect">
-            <a:avLst/>
-          </a:prstGeom>
-          <a:noFill/>
-          <a:ln/>
-        </p:spPr>
-        <p:txBody>
-          <a:bodyPr wrap="square" lIns="0" tIns="0" rIns="0" bIns="0" rtlCol="0" anchor="t"/>
-          <a:lstStyle/>
-          <a:p>
-            <a:pPr algn="ctr" indent="0" marL="0">
-              <a:buNone/>
-            </a:pPr>
-            <a:r>
-              <a:rPr lang="en-US" sz="1400" b="1" dirty="0">
-                <a:solidFill>
-                  <a:schemeClr val="tx1"/>
-                </a:solidFill>
-              </a:rPr>
-              <a:t>Línea base</a:t>
-            </a:r>
-            <a:endParaRPr lang="en-US" sz="1400" dirty="0"/>
-          </a:p>
-        </p:txBody>
-      </p:sp>
-      <p:sp>
-        <p:nvSpPr>
-          <p:cNvPr id="11" name="Text 9"/>
-          <p:cNvSpPr txBox="1"/>
-          <p:nvPr/>
-        </p:nvSpPr>
-        <p:spPr>
-          <a:xfrm>
-            <a:off x="1847088" y="3429000"/>
-            <a:ext cx="1325880" cy="1188720"/>
-          </a:xfrm>
-          <a:prstGeom prst="rect">
-            <a:avLst/>
-          </a:prstGeom>
-          <a:noFill/>
-          <a:ln/>
-        </p:spPr>
-        <p:txBody>
-          <a:bodyPr wrap="square" lIns="0" tIns="0" rIns="0" bIns="0" rtlCol="0" anchor="t"/>
-          <a:lstStyle/>
-          <a:p>
-            <a:pPr algn="ctr" indent="0" marL="0">
-              <a:buNone/>
-            </a:pPr>
-            <a:r>
-              <a:rPr lang="en-US" sz="1200" dirty="0">
-                <a:solidFill>
-                  <a:schemeClr val="accent4"/>
-                </a:solidFill>
-              </a:rPr>
-              <a:t>Maestro de artículos y ventas por SKU</a:t>
-            </a:r>
-            <a:endParaRPr lang="en-US" sz="1200" dirty="0"/>
-          </a:p>
-        </p:txBody>
-      </p:sp>
-      <p:sp>
-        <p:nvSpPr>
-          <p:cNvPr id="12" name="Text 10"/>
-          <p:cNvSpPr txBox="1"/>
-          <p:nvPr/>
-        </p:nvSpPr>
-        <p:spPr>
-          <a:xfrm>
-            <a:off x="3236976" y="1737360"/>
-            <a:ext cx="1325880" cy="457200"/>
-          </a:xfrm>
-          <a:prstGeom prst="rect">
-            <a:avLst/>
-          </a:prstGeom>
-          <a:noFill/>
-          <a:ln/>
-        </p:spPr>
-        <p:txBody>
-          <a:bodyPr wrap="square" lIns="0" tIns="0" rIns="0" bIns="0" rtlCol="0" anchor="t"/>
-          <a:lstStyle/>
-          <a:p>
-            <a:pPr algn="ctr" indent="0" marL="0">
-              <a:buNone/>
-            </a:pPr>
-            <a:r>
-              <a:rPr lang="en-US" sz="1400" b="1" dirty="0">
-                <a:solidFill>
-                  <a:schemeClr val="tx1"/>
-                </a:solidFill>
-              </a:rPr>
-              <a:t>3–13 nov</a:t>
-            </a:r>
-            <a:endParaRPr lang="en-US" sz="1400" dirty="0"/>
-          </a:p>
-        </p:txBody>
-      </p:sp>
-      <p:sp>
-        <p:nvSpPr>
-          <p:cNvPr id="13" name="Hito 3–13 nov"/>
+          <p:cNvPr id="14" name="Letra C"/>
           <p:cNvSpPr/>
           <p:nvPr/>
         </p:nvSpPr>
         <p:spPr>
           <a:xfrm>
-            <a:off x="3794760" y="2295144"/>
-            <a:ext cx="256032" cy="256032"/>
+            <a:off x="6309360" y="1371600"/>
+            <a:ext cx="640080" cy="640080"/>
           </a:xfrm>
           <a:prstGeom prst="ellipse">
             <a:avLst/>
           </a:prstGeom>
           <a:solidFill>
-            <a:schemeClr val="accent2"/>
+            <a:schemeClr val="accent3"/>
           </a:solidFill>
-          <a:ln w="25400">
+          <a:ln w="6350">
             <a:solidFill>
-              <a:schemeClr val="bg1"/>
+              <a:schemeClr val="accent3"/>
             </a:solidFill>
             <a:prstDash val="solid"/>
           </a:ln>
@@ -8156,14 +8943,53 @@
       </p:sp>
       <p:sp>
         <p:nvSpPr>
-          <p:cNvPr id="14" name="Text 12"/>
-          <p:cNvSpPr txBox="1"/>
-          <p:nvPr/>
-        </p:nvSpPr>
-        <p:spPr>
-          <a:xfrm>
-            <a:off x="3236976" y="2788920"/>
-            <a:ext cx="1325880" cy="548640"/>
+          <p:cNvPr id="15" name="Text 13"/>
+          <p:cNvSpPr txBox="1"/>
+          <p:nvPr/>
+        </p:nvSpPr>
+        <p:spPr>
+          <a:xfrm>
+            <a:off x="6309360" y="1371600"/>
+            <a:ext cx="640080" cy="640080"/>
+          </a:xfrm>
+          <a:prstGeom prst="rect">
+            <a:avLst/>
+          </a:prstGeom>
+          <a:noFill/>
+          <a:ln/>
+        </p:spPr>
+        <p:txBody>
+          <a:bodyPr wrap="square" lIns="0" tIns="0" rIns="0" bIns="0" rtlCol="0" anchor="ctr"/>
+          <a:lstStyle/>
+          <a:p>
+            <a:pPr algn="ctr" indent="0" marL="0">
+              <a:buNone/>
+            </a:pPr>
+            <a:r>
+              <a:rPr lang="en-US" sz="2400" b="1" dirty="0">
+                <a:solidFill>
+                  <a:schemeClr val="bg1"/>
+                </a:solidFill>
+                <a:latin typeface="+mj-lt" pitchFamily="34" charset="0"/>
+                <a:ea typeface="+mj-lt" pitchFamily="34" charset="-122"/>
+                <a:cs typeface="+mj-lt" pitchFamily="34" charset="-120"/>
+              </a:rPr>
+              <a:t>C</a:t>
+            </a:r>
+            <a:endParaRPr lang="en-US" sz="2400" dirty="0"/>
+          </a:p>
+        </p:txBody>
+      </p:sp>
+      <p:sp>
+        <p:nvSpPr>
+          <p:cNvPr id="16" name="Text 14"/>
+          <p:cNvSpPr txBox="1"/>
+          <p:nvPr/>
+        </p:nvSpPr>
+        <p:spPr>
+          <a:xfrm>
+            <a:off x="6309360" y="2194560"/>
+            <a:ext cx="2286000" cy="822960"/>
           </a:xfrm>
           <a:prstGeom prst="rect">
             <a:avLst/>
@@ -8175,7 +9001,79 @@
           <a:bodyPr wrap="square" lIns="0" tIns="0" rIns="0" bIns="0" rtlCol="0" anchor="t"/>
           <a:lstStyle/>
           <a:p>
-            <a:pPr algn="ctr" indent="0" marL="0">
+            <a:pPr indent="0" marL="0">
+              <a:buNone/>
+            </a:pPr>
+            <a:r>
+              <a:rPr lang="en-US" sz="1600" b="1" dirty="0">
+                <a:solidFill>
+                  <a:schemeClr val="tx1"/>
+                </a:solidFill>
+              </a:rPr>
+              <a:t>Una sola IA, sin fuente verificable</a:t>
+            </a:r>
+            <a:endParaRPr lang="en-US" sz="1600" dirty="0"/>
+          </a:p>
+        </p:txBody>
+      </p:sp>
+      <p:sp>
+        <p:nvSpPr>
+          <p:cNvPr id="17" name="Text 15"/>
+          <p:cNvSpPr txBox="1"/>
+          <p:nvPr/>
+        </p:nvSpPr>
+        <p:spPr>
+          <a:xfrm>
+            <a:off x="6309360" y="3017520"/>
+            <a:ext cx="2286000" cy="548640"/>
+          </a:xfrm>
+          <a:prstGeom prst="rect">
+            <a:avLst/>
+          </a:prstGeom>
+          <a:noFill/>
+          <a:ln/>
+        </p:spPr>
+        <p:txBody>
+          <a:bodyPr wrap="square" lIns="0" tIns="0" rIns="0" bIns="0" rtlCol="0" anchor="t"/>
+          <a:lstStyle/>
+          <a:p>
+            <a:pPr indent="0" marL="0">
+              <a:buNone/>
+            </a:pPr>
+            <a:r>
+              <a:rPr lang="en-US" sz="1400" dirty="0">
+                <a:solidFill>
+                  <a:schemeClr val="tx2"/>
+                </a:solidFill>
+              </a:rPr>
+              <a:t>No sustenta decisiones: se verifica antes</a:t>
+            </a:r>
+            <a:endParaRPr lang="en-US" sz="1400" dirty="0"/>
+          </a:p>
+        </p:txBody>
+      </p:sp>
+      <p:sp>
+        <p:nvSpPr>
+          <p:cNvPr id="18" name="Text 16"/>
+          <p:cNvSpPr txBox="1"/>
+          <p:nvPr/>
+        </p:nvSpPr>
+        <p:spPr>
+          <a:xfrm>
+            <a:off x="457200" y="3931920"/>
+            <a:ext cx="8229600" cy="548640"/>
+          </a:xfrm>
+          <a:prstGeom prst="rect">
+            <a:avLst/>
+          </a:prstGeom>
+          <a:noFill/>
+          <a:ln/>
+        </p:spPr>
+        <p:txBody>
+          <a:bodyPr wrap="square" lIns="0" tIns="0" rIns="0" bIns="0" rtlCol="0" anchor="t"/>
+          <a:lstStyle/>
+          <a:p>
+            <a:pPr indent="0" marL="0">
               <a:buNone/>
             </a:pPr>
             <a:r>
@@ -8184,444 +9082,9 @@
                   <a:schemeClr val="tx1"/>
                 </a:solidFill>
               </a:rPr>
-              <a:t>Embudo v1</a:t>
+              <a:t>Regla R3: cifra sin fuente, no existe. Un dato que no aparece en la fuente citada cuenta como alucinación de la herramienta que lo trajo.</a:t>
             </a:r>
             <a:endParaRPr lang="en-US" sz="1400" dirty="0"/>
-          </a:p>
-        </p:txBody>
-      </p:sp>
-      <p:sp>
-        <p:nvSpPr>
-          <p:cNvPr id="15" name="Text 13"/>
-          <p:cNvSpPr txBox="1"/>
-          <p:nvPr/>
-        </p:nvSpPr>
-        <p:spPr>
-          <a:xfrm>
-            <a:off x="3236976" y="3429000"/>
-            <a:ext cx="1325880" cy="1188720"/>
-          </a:xfrm>
-          <a:prstGeom prst="rect">
-            <a:avLst/>
-          </a:prstGeom>
-          <a:noFill/>
-          <a:ln/>
-        </p:spPr>
-        <p:txBody>
-          <a:bodyPr wrap="square" lIns="0" tIns="0" rIns="0" bIns="0" rtlCol="0" anchor="t"/>
-          <a:lstStyle/>
-          <a:p>
-            <a:pPr algn="ctr" indent="0" marL="0">
-              <a:buNone/>
-            </a:pPr>
-            <a:r>
-              <a:rPr lang="en-US" sz="1200" dirty="0">
-                <a:solidFill>
-                  <a:schemeClr val="accent4"/>
-                </a:solidFill>
-              </a:rPr>
-              <a:t>Universo, filtro regulatorio, mercado y primer ranking</a:t>
-            </a:r>
-            <a:endParaRPr lang="en-US" sz="1200" dirty="0"/>
-          </a:p>
-        </p:txBody>
-      </p:sp>
-      <p:sp>
-        <p:nvSpPr>
-          <p:cNvPr id="16" name="Text 14"/>
-          <p:cNvSpPr txBox="1"/>
-          <p:nvPr/>
-        </p:nvSpPr>
-        <p:spPr>
-          <a:xfrm>
-            <a:off x="4626864" y="1737360"/>
-            <a:ext cx="1325880" cy="457200"/>
-          </a:xfrm>
-          <a:prstGeom prst="rect">
-            <a:avLst/>
-          </a:prstGeom>
-          <a:noFill/>
-          <a:ln/>
-        </p:spPr>
-        <p:txBody>
-          <a:bodyPr wrap="square" lIns="0" tIns="0" rIns="0" bIns="0" rtlCol="0" anchor="t"/>
-          <a:lstStyle/>
-          <a:p>
-            <a:pPr algn="ctr" indent="0" marL="0">
-              <a:buNone/>
-            </a:pPr>
-            <a:r>
-              <a:rPr lang="en-US" sz="1400" b="1" dirty="0">
-                <a:solidFill>
-                  <a:schemeClr val="tx1"/>
-                </a:solidFill>
-              </a:rPr>
-              <a:t>13 nov</a:t>
-            </a:r>
-            <a:endParaRPr lang="en-US" sz="1400" dirty="0"/>
-          </a:p>
-        </p:txBody>
-      </p:sp>
-      <p:sp>
-        <p:nvSpPr>
-          <p:cNvPr id="17" name="Hito 13 nov"/>
-          <p:cNvSpPr/>
-          <p:nvPr/>
-        </p:nvSpPr>
-        <p:spPr>
-          <a:xfrm>
-            <a:off x="5184648" y="2295144"/>
-            <a:ext cx="256032" cy="256032"/>
-          </a:xfrm>
-          <a:prstGeom prst="ellipse">
-            <a:avLst/>
-          </a:prstGeom>
-          <a:solidFill>
-            <a:schemeClr val="accent3"/>
-          </a:solidFill>
-          <a:ln w="25400">
-            <a:solidFill>
-              <a:schemeClr val="bg1"/>
-            </a:solidFill>
-            <a:prstDash val="solid"/>
-          </a:ln>
-        </p:spPr>
-      </p:sp>
-      <p:sp>
-        <p:nvSpPr>
-          <p:cNvPr id="18" name="Text 16"/>
-          <p:cNvSpPr txBox="1"/>
-          <p:nvPr/>
-        </p:nvSpPr>
-        <p:spPr>
-          <a:xfrm>
-            <a:off x="4626864" y="2788920"/>
-            <a:ext cx="1325880" cy="548640"/>
-          </a:xfrm>
-          <a:prstGeom prst="rect">
-            <a:avLst/>
-          </a:prstGeom>
-          <a:noFill/>
-          <a:ln/>
-        </p:spPr>
-        <p:txBody>
-          <a:bodyPr wrap="square" lIns="0" tIns="0" rIns="0" bIns="0" rtlCol="0" anchor="t"/>
-          <a:lstStyle/>
-          <a:p>
-            <a:pPr algn="ctr" indent="0" marL="0">
-              <a:buNone/>
-            </a:pPr>
-            <a:r>
-              <a:rPr lang="en-US" sz="1400" b="1" dirty="0">
-                <a:solidFill>
-                  <a:schemeClr val="tx1"/>
-                </a:solidFill>
-              </a:rPr>
-              <a:t>Entrega parcial</a:t>
-            </a:r>
-            <a:endParaRPr lang="en-US" sz="1400" dirty="0"/>
-          </a:p>
-        </p:txBody>
-      </p:sp>
-      <p:sp>
-        <p:nvSpPr>
-          <p:cNvPr id="19" name="Text 17"/>
-          <p:cNvSpPr txBox="1"/>
-          <p:nvPr/>
-        </p:nvSpPr>
-        <p:spPr>
-          <a:xfrm>
-            <a:off x="4626864" y="3429000"/>
-            <a:ext cx="1325880" cy="1188720"/>
-          </a:xfrm>
-          <a:prstGeom prst="rect">
-            <a:avLst/>
-          </a:prstGeom>
-          <a:noFill/>
-          <a:ln/>
-        </p:spPr>
-        <p:txBody>
-          <a:bodyPr wrap="square" lIns="0" tIns="0" rIns="0" bIns="0" rtlCol="0" anchor="t"/>
-          <a:lstStyle/>
-          <a:p>
-            <a:pPr algn="ctr" indent="0" marL="0">
-              <a:buNone/>
-            </a:pPr>
-            <a:r>
-              <a:rPr lang="en-US" sz="1200" dirty="0">
-                <a:solidFill>
-                  <a:schemeClr val="accent4"/>
-                </a:solidFill>
-              </a:rPr>
-              <a:t>Ranking preliminar y guía de uso del Project</a:t>
-            </a:r>
-            <a:endParaRPr lang="en-US" sz="1200" dirty="0"/>
-          </a:p>
-        </p:txBody>
-      </p:sp>
-      <p:sp>
-        <p:nvSpPr>
-          <p:cNvPr id="20" name="Text 18"/>
-          <p:cNvSpPr txBox="1"/>
-          <p:nvPr/>
-        </p:nvSpPr>
-        <p:spPr>
-          <a:xfrm>
-            <a:off x="6016752" y="1737360"/>
-            <a:ext cx="1325880" cy="457200"/>
-          </a:xfrm>
-          <a:prstGeom prst="rect">
-            <a:avLst/>
-          </a:prstGeom>
-          <a:noFill/>
-          <a:ln/>
-        </p:spPr>
-        <p:txBody>
-          <a:bodyPr wrap="square" lIns="0" tIns="0" rIns="0" bIns="0" rtlCol="0" anchor="t"/>
-          <a:lstStyle/>
-          <a:p>
-            <a:pPr algn="ctr" indent="0" marL="0">
-              <a:buNone/>
-            </a:pPr>
-            <a:r>
-              <a:rPr lang="en-US" sz="1400" b="1" dirty="0">
-                <a:solidFill>
-                  <a:schemeClr val="tx1"/>
-                </a:solidFill>
-              </a:rPr>
-              <a:t>17 nov – 3 dic</a:t>
-            </a:r>
-            <a:endParaRPr lang="en-US" sz="1400" dirty="0"/>
-          </a:p>
-        </p:txBody>
-      </p:sp>
-      <p:sp>
-        <p:nvSpPr>
-          <p:cNvPr id="21" name="Hito 17 nov – 3 dic"/>
-          <p:cNvSpPr/>
-          <p:nvPr/>
-        </p:nvSpPr>
-        <p:spPr>
-          <a:xfrm>
-            <a:off x="6574536" y="2295144"/>
-            <a:ext cx="256032" cy="256032"/>
-          </a:xfrm>
-          <a:prstGeom prst="ellipse">
-            <a:avLst/>
-          </a:prstGeom>
-          <a:solidFill>
-            <a:schemeClr val="accent4"/>
-          </a:solidFill>
-          <a:ln w="25400">
-            <a:solidFill>
-              <a:schemeClr val="bg1"/>
-            </a:solidFill>
-            <a:prstDash val="solid"/>
-          </a:ln>
-        </p:spPr>
-      </p:sp>
-      <p:sp>
-        <p:nvSpPr>
-          <p:cNvPr id="22" name="Text 20"/>
-          <p:cNvSpPr txBox="1"/>
-          <p:nvPr/>
-        </p:nvSpPr>
-        <p:spPr>
-          <a:xfrm>
-            <a:off x="6016752" y="2788920"/>
-            <a:ext cx="1325880" cy="548640"/>
-          </a:xfrm>
-          <a:prstGeom prst="rect">
-            <a:avLst/>
-          </a:prstGeom>
-          <a:noFill/>
-          <a:ln/>
-        </p:spPr>
-        <p:txBody>
-          <a:bodyPr wrap="square" lIns="0" tIns="0" rIns="0" bIns="0" rtlCol="0" anchor="t"/>
-          <a:lstStyle/>
-          <a:p>
-            <a:pPr algn="ctr" indent="0" marL="0">
-              <a:buNone/>
-            </a:pPr>
-            <a:r>
-              <a:rPr lang="en-US" sz="1400" b="1" dirty="0">
-                <a:solidFill>
-                  <a:schemeClr val="accent4"/>
-                </a:solidFill>
-              </a:rPr>
-              <a:t>Pausa del consultor</a:t>
-            </a:r>
-            <a:endParaRPr lang="en-US" sz="1400" dirty="0"/>
-          </a:p>
-        </p:txBody>
-      </p:sp>
-      <p:sp>
-        <p:nvSpPr>
-          <p:cNvPr id="23" name="Text 21"/>
-          <p:cNvSpPr txBox="1"/>
-          <p:nvPr/>
-        </p:nvSpPr>
-        <p:spPr>
-          <a:xfrm>
-            <a:off x="6016752" y="3429000"/>
-            <a:ext cx="1325880" cy="1188720"/>
-          </a:xfrm>
-          <a:prstGeom prst="rect">
-            <a:avLst/>
-          </a:prstGeom>
-          <a:noFill/>
-          <a:ln/>
-        </p:spPr>
-        <p:txBody>
-          <a:bodyPr wrap="square" lIns="0" tIns="0" rIns="0" bIns="0" rtlCol="0" anchor="t"/>
-          <a:lstStyle/>
-          <a:p>
-            <a:pPr algn="ctr" indent="0" marL="0">
-              <a:buNone/>
-            </a:pPr>
-            <a:r>
-              <a:rPr lang="en-US" sz="1200" dirty="0">
-                <a:solidFill>
-                  <a:schemeClr val="accent4"/>
-                </a:solidFill>
-              </a:rPr>
-              <a:t>Sin construcción nueva; consultas básicas</a:t>
-            </a:r>
-            <a:endParaRPr lang="en-US" sz="1200" dirty="0"/>
-          </a:p>
-        </p:txBody>
-      </p:sp>
-      <p:sp>
-        <p:nvSpPr>
-          <p:cNvPr id="24" name="Text 22"/>
-          <p:cNvSpPr txBox="1"/>
-          <p:nvPr/>
-        </p:nvSpPr>
-        <p:spPr>
-          <a:xfrm>
-            <a:off x="7406640" y="1737360"/>
-            <a:ext cx="1325880" cy="457200"/>
-          </a:xfrm>
-          <a:prstGeom prst="rect">
-            <a:avLst/>
-          </a:prstGeom>
-          <a:noFill/>
-          <a:ln/>
-        </p:spPr>
-        <p:txBody>
-          <a:bodyPr wrap="square" lIns="0" tIns="0" rIns="0" bIns="0" rtlCol="0" anchor="t"/>
-          <a:lstStyle/>
-          <a:p>
-            <a:pPr algn="ctr" indent="0" marL="0">
-              <a:buNone/>
-            </a:pPr>
-            <a:r>
-              <a:rPr lang="en-US" sz="1400" b="1" dirty="0">
-                <a:solidFill>
-                  <a:schemeClr val="tx1"/>
-                </a:solidFill>
-              </a:rPr>
-              <a:t>4–18 dic</a:t>
-            </a:r>
-            <a:endParaRPr lang="en-US" sz="1400" dirty="0"/>
-          </a:p>
-        </p:txBody>
-      </p:sp>
-      <p:sp>
-        <p:nvSpPr>
-          <p:cNvPr id="25" name="Hito 4–18 dic"/>
-          <p:cNvSpPr/>
-          <p:nvPr/>
-        </p:nvSpPr>
-        <p:spPr>
-          <a:xfrm>
-            <a:off x="7964424" y="2295144"/>
-            <a:ext cx="256032" cy="256032"/>
-          </a:xfrm>
-          <a:prstGeom prst="ellipse">
-            <a:avLst/>
-          </a:prstGeom>
-          <a:solidFill>
-            <a:schemeClr val="accent2"/>
-          </a:solidFill>
-          <a:ln w="25400">
-            <a:solidFill>
-              <a:schemeClr val="bg1"/>
-            </a:solidFill>
-            <a:prstDash val="solid"/>
-          </a:ln>
-        </p:spPr>
-      </p:sp>
-      <p:sp>
-        <p:nvSpPr>
-          <p:cNvPr id="26" name="Text 24"/>
-          <p:cNvSpPr txBox="1"/>
-          <p:nvPr/>
-        </p:nvSpPr>
-        <p:spPr>
-          <a:xfrm>
-            <a:off x="7406640" y="2788920"/>
-            <a:ext cx="1325880" cy="548640"/>
-          </a:xfrm>
-          <a:prstGeom prst="rect">
-            <a:avLst/>
-          </a:prstGeom>
-          <a:noFill/>
-          <a:ln/>
-        </p:spPr>
-        <p:txBody>
-          <a:bodyPr wrap="square" lIns="0" tIns="0" rIns="0" bIns="0" rtlCol="0" anchor="t"/>
-          <a:lstStyle/>
-          <a:p>
-            <a:pPr algn="ctr" indent="0" marL="0">
-              <a:buNone/>
-            </a:pPr>
-            <a:r>
-              <a:rPr lang="en-US" sz="1400" b="1" dirty="0">
-                <a:solidFill>
-                  <a:schemeClr val="tx1"/>
-                </a:solidFill>
-              </a:rPr>
-              <a:t>Cierre</a:t>
-            </a:r>
-            <a:endParaRPr lang="en-US" sz="1400" dirty="0"/>
-          </a:p>
-        </p:txBody>
-      </p:sp>
-      <p:sp>
-        <p:nvSpPr>
-          <p:cNvPr id="27" name="Text 25"/>
-          <p:cNvSpPr txBox="1"/>
-          <p:nvPr/>
-        </p:nvSpPr>
-        <p:spPr>
-          <a:xfrm>
-            <a:off x="7406640" y="3429000"/>
-            <a:ext cx="1325880" cy="1188720"/>
-          </a:xfrm>
-          <a:prstGeom prst="rect">
-            <a:avLst/>
-          </a:prstGeom>
-          <a:noFill/>
-          <a:ln/>
-        </p:spPr>
-        <p:txBody>
-          <a:bodyPr wrap="square" lIns="0" tIns="0" rIns="0" bIns="0" rtlCol="0" anchor="t"/>
-          <a:lstStyle/>
-          <a:p>
-            <a:pPr algn="ctr" indent="0" marL="0">
-              <a:buNone/>
-            </a:pPr>
-            <a:r>
-              <a:rPr lang="en-US" sz="1200" dirty="0">
-                <a:solidFill>
-                  <a:schemeClr val="accent4"/>
-                </a:solidFill>
-              </a:rPr>
-              <a:t>Make/Buy, shortlist, fichas de Compuerta 1 y Presupuesto 2027</a:t>
-            </a:r>
-            <a:endParaRPr lang="en-US" sz="1200" dirty="0"/>
           </a:p>
         </p:txBody>
       </p:sp>
@@ -8727,7 +9190,7 @@
                   <a:schemeClr val="tx1"/>
                 </a:solidFill>
               </a:rPr>
-              <a:t>Cuatro decisiones para hoy</a:t>
+              <a:t>Ruta al 18 de diciembre</a:t>
             </a:r>
             <a:endParaRPr lang="en-US" sz="3200" dirty="0"/>
           </a:p>
@@ -8735,24 +9198,20 @@
       </p:sp>
       <p:sp>
         <p:nvSpPr>
-          <p:cNvPr id="3" name="Decision 1"/>
+          <p:cNvPr id="3" name="Linea de tiempo"/>
           <p:cNvSpPr/>
           <p:nvPr/>
         </p:nvSpPr>
         <p:spPr>
           <a:xfrm>
-            <a:off x="457200" y="1188720"/>
-            <a:ext cx="4023360" cy="1463040"/>
-          </a:xfrm>
-          <a:prstGeom prst="roundRect">
-            <a:avLst>
-              <a:gd name="adj" fmla="val 7500"/>
-            </a:avLst>
-          </a:prstGeom>
-          <a:solidFill>
-            <a:schemeClr val="bg2"/>
-          </a:solidFill>
-          <a:ln w="9525">
+            <a:off x="685800" y="2423160"/>
+            <a:ext cx="7772400" cy="0"/>
+          </a:xfrm>
+          <a:prstGeom prst="line">
+            <a:avLst/>
+          </a:prstGeom>
+          <a:noFill/>
+          <a:ln w="25400">
             <a:solidFill>
               <a:schemeClr val="accent6"/>
             </a:solidFill>
@@ -8762,14 +9221,50 @@
       </p:sp>
       <p:sp>
         <p:nvSpPr>
-          <p:cNvPr id="4" name="Numero 1"/>
+          <p:cNvPr id="4" name="Text 2"/>
+          <p:cNvSpPr txBox="1"/>
+          <p:nvPr/>
+        </p:nvSpPr>
+        <p:spPr>
+          <a:xfrm>
+            <a:off x="457200" y="1737360"/>
+            <a:ext cx="1325880" cy="457200"/>
+          </a:xfrm>
+          <a:prstGeom prst="rect">
+            <a:avLst/>
+          </a:prstGeom>
+          <a:noFill/>
+          <a:ln/>
+        </p:spPr>
+        <p:txBody>
+          <a:bodyPr wrap="square" lIns="0" tIns="0" rIns="0" bIns="0" rtlCol="0" anchor="t"/>
+          <a:lstStyle/>
+          <a:p>
+            <a:pPr algn="ctr" indent="0" marL="0">
+              <a:buNone/>
+            </a:pPr>
+            <a:r>
+              <a:rPr lang="en-US" sz="1400" b="1" dirty="0">
+                <a:solidFill>
+                  <a:schemeClr val="tx1"/>
+                </a:solidFill>
+              </a:rPr>
+              <a:t>28 oct</a:t>
+            </a:r>
+            <a:endParaRPr lang="en-US" sz="1400" dirty="0"/>
+          </a:p>
+        </p:txBody>
+      </p:sp>
+      <p:sp>
+        <p:nvSpPr>
+          <p:cNvPr id="5" name="Hito 28 oct"/>
           <p:cNvSpPr/>
           <p:nvPr/>
         </p:nvSpPr>
         <p:spPr>
           <a:xfrm>
-            <a:off x="640080" y="1371600"/>
-            <a:ext cx="457200" cy="457200"/>
+            <a:off x="1014984" y="2295144"/>
+            <a:ext cx="256032" cy="256032"/>
           </a:xfrm>
           <a:prstGeom prst="ellipse">
             <a:avLst/>
@@ -8777,9 +9272,9 @@
           <a:solidFill>
             <a:schemeClr val="accent1"/>
           </a:solidFill>
-          <a:ln w="6350">
+          <a:ln w="25400">
             <a:solidFill>
-              <a:schemeClr val="accent1"/>
+              <a:schemeClr val="bg1"/>
             </a:solidFill>
             <a:prstDash val="solid"/>
           </a:ln>
@@ -8787,53 +9282,50 @@
       </p:sp>
       <p:sp>
         <p:nvSpPr>
-          <p:cNvPr id="5" name="Text 3"/>
-          <p:cNvSpPr txBox="1"/>
-          <p:nvPr/>
-        </p:nvSpPr>
-        <p:spPr>
-          <a:xfrm>
-            <a:off x="640080" y="1371600"/>
-            <a:ext cx="457200" cy="457200"/>
-          </a:xfrm>
-          <a:prstGeom prst="rect">
-            <a:avLst/>
-          </a:prstGeom>
-          <a:noFill/>
-          <a:ln/>
-        </p:spPr>
-        <p:txBody>
-          <a:bodyPr wrap="square" lIns="0" tIns="0" rIns="0" bIns="0" rtlCol="0" anchor="ctr"/>
+          <p:cNvPr id="6" name="Text 4"/>
+          <p:cNvSpPr txBox="1"/>
+          <p:nvPr/>
+        </p:nvSpPr>
+        <p:spPr>
+          <a:xfrm>
+            <a:off x="457200" y="2788920"/>
+            <a:ext cx="1325880" cy="548640"/>
+          </a:xfrm>
+          <a:prstGeom prst="rect">
+            <a:avLst/>
+          </a:prstGeom>
+          <a:noFill/>
+          <a:ln/>
+        </p:spPr>
+        <p:txBody>
+          <a:bodyPr wrap="square" lIns="0" tIns="0" rIns="0" bIns="0" rtlCol="0" anchor="t"/>
           <a:lstStyle/>
           <a:p>
             <a:pPr algn="ctr" indent="0" marL="0">
               <a:buNone/>
             </a:pPr>
             <a:r>
-              <a:rPr lang="en-US" sz="1800" b="1" dirty="0">
+              <a:rPr lang="en-US" sz="1400" b="1" dirty="0">
                 <a:solidFill>
                   <a:schemeClr val="tx1"/>
                 </a:solidFill>
-                <a:latin typeface="+mj-lt" pitchFamily="34" charset="0"/>
-                <a:ea typeface="+mj-lt" pitchFamily="34" charset="-122"/>
-                <a:cs typeface="+mj-lt" pitchFamily="34" charset="-120"/>
-              </a:rPr>
-              <a:t>1</a:t>
-            </a:r>
-            <a:endParaRPr lang="en-US" sz="1800" dirty="0"/>
-          </a:p>
-        </p:txBody>
-      </p:sp>
-      <p:sp>
-        <p:nvSpPr>
-          <p:cNvPr id="6" name="Text 4"/>
-          <p:cNvSpPr txBox="1"/>
-          <p:nvPr/>
-        </p:nvSpPr>
-        <p:spPr>
-          <a:xfrm>
-            <a:off x="1280160" y="1371600"/>
-            <a:ext cx="3017520" cy="365760"/>
+              </a:rPr>
+              <a:t>Sesión de arranque</a:t>
+            </a:r>
+            <a:endParaRPr lang="en-US" sz="1400" dirty="0"/>
+          </a:p>
+        </p:txBody>
+      </p:sp>
+      <p:sp>
+        <p:nvSpPr>
+          <p:cNvPr id="7" name="Text 5"/>
+          <p:cNvSpPr txBox="1"/>
+          <p:nvPr/>
+        </p:nvSpPr>
+        <p:spPr>
+          <a:xfrm>
+            <a:off x="457200" y="3429000"/>
+            <a:ext cx="1325880" cy="1188720"/>
           </a:xfrm>
           <a:prstGeom prst="rect">
             <a:avLst/>
@@ -8845,55 +9337,52 @@
           <a:bodyPr wrap="square" lIns="0" tIns="0" rIns="0" bIns="0" rtlCol="0" anchor="t"/>
           <a:lstStyle/>
           <a:p>
-            <a:pPr indent="0" marL="0">
-              <a:buNone/>
-            </a:pPr>
-            <a:r>
-              <a:rPr lang="en-US" sz="1800" b="1" dirty="0">
+            <a:pPr algn="ctr" indent="0" marL="0">
+              <a:buNone/>
+            </a:pPr>
+            <a:r>
+              <a:rPr lang="en-US" sz="1200" dirty="0">
+                <a:solidFill>
+                  <a:schemeClr val="accent4"/>
+                </a:solidFill>
+              </a:rPr>
+              <a:t>Decisiones y respuestas de hoy</a:t>
+            </a:r>
+            <a:endParaRPr lang="en-US" sz="1200" dirty="0"/>
+          </a:p>
+        </p:txBody>
+      </p:sp>
+      <p:sp>
+        <p:nvSpPr>
+          <p:cNvPr id="8" name="Text 6"/>
+          <p:cNvSpPr txBox="1"/>
+          <p:nvPr/>
+        </p:nvSpPr>
+        <p:spPr>
+          <a:xfrm>
+            <a:off x="1847088" y="1737360"/>
+            <a:ext cx="1325880" cy="457200"/>
+          </a:xfrm>
+          <a:prstGeom prst="rect">
+            <a:avLst/>
+          </a:prstGeom>
+          <a:noFill/>
+          <a:ln/>
+        </p:spPr>
+        <p:txBody>
+          <a:bodyPr wrap="square" lIns="0" tIns="0" rIns="0" bIns="0" rtlCol="0" anchor="t"/>
+          <a:lstStyle/>
+          <a:p>
+            <a:pPr algn="ctr" indent="0" marL="0">
+              <a:buNone/>
+            </a:pPr>
+            <a:r>
+              <a:rPr lang="en-US" sz="1400" b="1" dirty="0">
                 <a:solidFill>
                   <a:schemeClr val="tx1"/>
                 </a:solidFill>
-                <a:latin typeface="+mj-lt" pitchFamily="34" charset="0"/>
-                <a:ea typeface="+mj-lt" pitchFamily="34" charset="-122"/>
-                <a:cs typeface="+mj-lt" pitchFamily="34" charset="-120"/>
-              </a:rPr>
-              <a:t>Definir la meta</a:t>
-            </a:r>
-            <a:endParaRPr lang="en-US" sz="1800" dirty="0"/>
-          </a:p>
-        </p:txBody>
-      </p:sp>
-      <p:sp>
-        <p:nvSpPr>
-          <p:cNvPr id="7" name="Text 5"/>
-          <p:cNvSpPr txBox="1"/>
-          <p:nvPr/>
-        </p:nvSpPr>
-        <p:spPr>
-          <a:xfrm>
-            <a:off x="1280160" y="1810512"/>
-            <a:ext cx="3017520" cy="777240"/>
-          </a:xfrm>
-          <a:prstGeom prst="rect">
-            <a:avLst/>
-          </a:prstGeom>
-          <a:noFill/>
-          <a:ln/>
-        </p:spPr>
-        <p:txBody>
-          <a:bodyPr wrap="square" lIns="0" tIns="0" rIns="0" bIns="0" rtlCol="0" anchor="t"/>
-          <a:lstStyle/>
-          <a:p>
-            <a:pPr indent="0" marL="0">
-              <a:buNone/>
-            </a:pPr>
-            <a:r>
-              <a:rPr lang="en-US" sz="1400" dirty="0">
-                <a:solidFill>
-                  <a:schemeClr val="tx1"/>
-                </a:solidFill>
-              </a:rPr>
-              <a:t>300 SKUs en cartera o 300 lanzamientos; qué cuenta como SKU y en qué plazo.</a:t>
+              </a:rPr>
+              <a:t>29–31 oct</a:t>
             </a:r>
             <a:endParaRPr lang="en-US" sz="1400" dirty="0"/>
           </a:p>
@@ -8901,26 +9390,24 @@
       </p:sp>
       <p:sp>
         <p:nvSpPr>
-          <p:cNvPr id="8" name="Decision 2"/>
+          <p:cNvPr id="9" name="Hito 29–31 oct"/>
           <p:cNvSpPr/>
           <p:nvPr/>
         </p:nvSpPr>
         <p:spPr>
           <a:xfrm>
-            <a:off x="4663440" y="1188720"/>
-            <a:ext cx="4023360" cy="1463040"/>
-          </a:xfrm>
-          <a:prstGeom prst="roundRect">
-            <a:avLst>
-              <a:gd name="adj" fmla="val 7500"/>
-            </a:avLst>
+            <a:off x="2404872" y="2295144"/>
+            <a:ext cx="256032" cy="256032"/>
+          </a:xfrm>
+          <a:prstGeom prst="ellipse">
+            <a:avLst/>
           </a:prstGeom>
           <a:solidFill>
-            <a:schemeClr val="bg2"/>
+            <a:schemeClr val="accent2"/>
           </a:solidFill>
-          <a:ln w="9525">
+          <a:ln w="25400">
             <a:solidFill>
-              <a:schemeClr val="accent6"/>
+              <a:schemeClr val="bg1"/>
             </a:solidFill>
             <a:prstDash val="solid"/>
           </a:ln>
@@ -8928,24 +9415,132 @@
       </p:sp>
       <p:sp>
         <p:nvSpPr>
-          <p:cNvPr id="9" name="Numero 2"/>
+          <p:cNvPr id="10" name="Text 8"/>
+          <p:cNvSpPr txBox="1"/>
+          <p:nvPr/>
+        </p:nvSpPr>
+        <p:spPr>
+          <a:xfrm>
+            <a:off x="1847088" y="2788920"/>
+            <a:ext cx="1325880" cy="548640"/>
+          </a:xfrm>
+          <a:prstGeom prst="rect">
+            <a:avLst/>
+          </a:prstGeom>
+          <a:noFill/>
+          <a:ln/>
+        </p:spPr>
+        <p:txBody>
+          <a:bodyPr wrap="square" lIns="0" tIns="0" rIns="0" bIns="0" rtlCol="0" anchor="t"/>
+          <a:lstStyle/>
+          <a:p>
+            <a:pPr algn="ctr" indent="0" marL="0">
+              <a:buNone/>
+            </a:pPr>
+            <a:r>
+              <a:rPr lang="en-US" sz="1400" b="1" dirty="0">
+                <a:solidFill>
+                  <a:schemeClr val="tx1"/>
+                </a:solidFill>
+              </a:rPr>
+              <a:t>Línea base</a:t>
+            </a:r>
+            <a:endParaRPr lang="en-US" sz="1400" dirty="0"/>
+          </a:p>
+        </p:txBody>
+      </p:sp>
+      <p:sp>
+        <p:nvSpPr>
+          <p:cNvPr id="11" name="Text 9"/>
+          <p:cNvSpPr txBox="1"/>
+          <p:nvPr/>
+        </p:nvSpPr>
+        <p:spPr>
+          <a:xfrm>
+            <a:off x="1847088" y="3429000"/>
+            <a:ext cx="1325880" cy="1188720"/>
+          </a:xfrm>
+          <a:prstGeom prst="rect">
+            <a:avLst/>
+          </a:prstGeom>
+          <a:noFill/>
+          <a:ln/>
+        </p:spPr>
+        <p:txBody>
+          <a:bodyPr wrap="square" lIns="0" tIns="0" rIns="0" bIns="0" rtlCol="0" anchor="t"/>
+          <a:lstStyle/>
+          <a:p>
+            <a:pPr algn="ctr" indent="0" marL="0">
+              <a:buNone/>
+            </a:pPr>
+            <a:r>
+              <a:rPr lang="en-US" sz="1200" dirty="0">
+                <a:solidFill>
+                  <a:schemeClr val="accent4"/>
+                </a:solidFill>
+              </a:rPr>
+              <a:t>Maestro de artículos y ventas por SKU</a:t>
+            </a:r>
+            <a:endParaRPr lang="en-US" sz="1200" dirty="0"/>
+          </a:p>
+        </p:txBody>
+      </p:sp>
+      <p:sp>
+        <p:nvSpPr>
+          <p:cNvPr id="12" name="Text 10"/>
+          <p:cNvSpPr txBox="1"/>
+          <p:nvPr/>
+        </p:nvSpPr>
+        <p:spPr>
+          <a:xfrm>
+            <a:off x="3236976" y="1737360"/>
+            <a:ext cx="1325880" cy="457200"/>
+          </a:xfrm>
+          <a:prstGeom prst="rect">
+            <a:avLst/>
+          </a:prstGeom>
+          <a:noFill/>
+          <a:ln/>
+        </p:spPr>
+        <p:txBody>
+          <a:bodyPr wrap="square" lIns="0" tIns="0" rIns="0" bIns="0" rtlCol="0" anchor="t"/>
+          <a:lstStyle/>
+          <a:p>
+            <a:pPr algn="ctr" indent="0" marL="0">
+              <a:buNone/>
+            </a:pPr>
+            <a:r>
+              <a:rPr lang="en-US" sz="1400" b="1" dirty="0">
+                <a:solidFill>
+                  <a:schemeClr val="tx1"/>
+                </a:solidFill>
+              </a:rPr>
+              <a:t>3–13 nov</a:t>
+            </a:r>
+            <a:endParaRPr lang="en-US" sz="1400" dirty="0"/>
+          </a:p>
+        </p:txBody>
+      </p:sp>
+      <p:sp>
+        <p:nvSpPr>
+          <p:cNvPr id="13" name="Hito 3–13 nov"/>
           <p:cNvSpPr/>
           <p:nvPr/>
         </p:nvSpPr>
         <p:spPr>
           <a:xfrm>
-            <a:off x="4846320" y="1371600"/>
-            <a:ext cx="457200" cy="457200"/>
+            <a:off x="3794760" y="2295144"/>
+            <a:ext cx="256032" cy="256032"/>
           </a:xfrm>
           <a:prstGeom prst="ellipse">
             <a:avLst/>
           </a:prstGeom>
           <a:solidFill>
-            <a:schemeClr val="accent1"/>
+            <a:schemeClr val="accent2"/>
           </a:solidFill>
-          <a:ln w="6350">
+          <a:ln w="25400">
             <a:solidFill>
-              <a:schemeClr val="accent1"/>
+              <a:schemeClr val="bg1"/>
             </a:solidFill>
             <a:prstDash val="solid"/>
           </a:ln>
@@ -8953,53 +9548,50 @@
       </p:sp>
       <p:sp>
         <p:nvSpPr>
-          <p:cNvPr id="10" name="Text 8"/>
-          <p:cNvSpPr txBox="1"/>
-          <p:nvPr/>
-        </p:nvSpPr>
-        <p:spPr>
-          <a:xfrm>
-            <a:off x="4846320" y="1371600"/>
-            <a:ext cx="457200" cy="457200"/>
-          </a:xfrm>
-          <a:prstGeom prst="rect">
-            <a:avLst/>
-          </a:prstGeom>
-          <a:noFill/>
-          <a:ln/>
-        </p:spPr>
-        <p:txBody>
-          <a:bodyPr wrap="square" lIns="0" tIns="0" rIns="0" bIns="0" rtlCol="0" anchor="ctr"/>
+          <p:cNvPr id="14" name="Text 12"/>
+          <p:cNvSpPr txBox="1"/>
+          <p:nvPr/>
+        </p:nvSpPr>
+        <p:spPr>
+          <a:xfrm>
+            <a:off x="3236976" y="2788920"/>
+            <a:ext cx="1325880" cy="548640"/>
+          </a:xfrm>
+          <a:prstGeom prst="rect">
+            <a:avLst/>
+          </a:prstGeom>
+          <a:noFill/>
+          <a:ln/>
+        </p:spPr>
+        <p:txBody>
+          <a:bodyPr wrap="square" lIns="0" tIns="0" rIns="0" bIns="0" rtlCol="0" anchor="t"/>
           <a:lstStyle/>
           <a:p>
             <a:pPr algn="ctr" indent="0" marL="0">
               <a:buNone/>
             </a:pPr>
             <a:r>
-              <a:rPr lang="en-US" sz="1800" b="1" dirty="0">
+              <a:rPr lang="en-US" sz="1400" b="1" dirty="0">
                 <a:solidFill>
                   <a:schemeClr val="tx1"/>
                 </a:solidFill>
-                <a:latin typeface="+mj-lt" pitchFamily="34" charset="0"/>
-                <a:ea typeface="+mj-lt" pitchFamily="34" charset="-122"/>
-                <a:cs typeface="+mj-lt" pitchFamily="34" charset="-120"/>
-              </a:rPr>
-              <a:t>2</a:t>
-            </a:r>
-            <a:endParaRPr lang="en-US" sz="1800" dirty="0"/>
-          </a:p>
-        </p:txBody>
-      </p:sp>
-      <p:sp>
-        <p:nvSpPr>
-          <p:cNvPr id="11" name="Text 9"/>
-          <p:cNvSpPr txBox="1"/>
-          <p:nvPr/>
-        </p:nvSpPr>
-        <p:spPr>
-          <a:xfrm>
-            <a:off x="5486400" y="1371600"/>
-            <a:ext cx="3017520" cy="365760"/>
+              </a:rPr>
+              <a:t>Embudo v1</a:t>
+            </a:r>
+            <a:endParaRPr lang="en-US" sz="1400" dirty="0"/>
+          </a:p>
+        </p:txBody>
+      </p:sp>
+      <p:sp>
+        <p:nvSpPr>
+          <p:cNvPr id="15" name="Text 13"/>
+          <p:cNvSpPr txBox="1"/>
+          <p:nvPr/>
+        </p:nvSpPr>
+        <p:spPr>
+          <a:xfrm>
+            <a:off x="3236976" y="3429000"/>
+            <a:ext cx="1325880" cy="1188720"/>
           </a:xfrm>
           <a:prstGeom prst="rect">
             <a:avLst/>
@@ -9011,55 +9603,52 @@
           <a:bodyPr wrap="square" lIns="0" tIns="0" rIns="0" bIns="0" rtlCol="0" anchor="t"/>
           <a:lstStyle/>
           <a:p>
-            <a:pPr indent="0" marL="0">
-              <a:buNone/>
-            </a:pPr>
-            <a:r>
-              <a:rPr lang="en-US" sz="1800" b="1" dirty="0">
+            <a:pPr algn="ctr" indent="0" marL="0">
+              <a:buNone/>
+            </a:pPr>
+            <a:r>
+              <a:rPr lang="en-US" sz="1200" dirty="0">
+                <a:solidFill>
+                  <a:schemeClr val="accent4"/>
+                </a:solidFill>
+              </a:rPr>
+              <a:t>Universo, filtro regulatorio, mercado y primer ranking</a:t>
+            </a:r>
+            <a:endParaRPr lang="en-US" sz="1200" dirty="0"/>
+          </a:p>
+        </p:txBody>
+      </p:sp>
+      <p:sp>
+        <p:nvSpPr>
+          <p:cNvPr id="16" name="Text 14"/>
+          <p:cNvSpPr txBox="1"/>
+          <p:nvPr/>
+        </p:nvSpPr>
+        <p:spPr>
+          <a:xfrm>
+            <a:off x="4626864" y="1737360"/>
+            <a:ext cx="1325880" cy="457200"/>
+          </a:xfrm>
+          <a:prstGeom prst="rect">
+            <a:avLst/>
+          </a:prstGeom>
+          <a:noFill/>
+          <a:ln/>
+        </p:spPr>
+        <p:txBody>
+          <a:bodyPr wrap="square" lIns="0" tIns="0" rIns="0" bIns="0" rtlCol="0" anchor="t"/>
+          <a:lstStyle/>
+          <a:p>
+            <a:pPr algn="ctr" indent="0" marL="0">
+              <a:buNone/>
+            </a:pPr>
+            <a:r>
+              <a:rPr lang="en-US" sz="1400" b="1" dirty="0">
                 <a:solidFill>
                   <a:schemeClr val="tx1"/>
                 </a:solidFill>
-                <a:latin typeface="+mj-lt" pitchFamily="34" charset="0"/>
-                <a:ea typeface="+mj-lt" pitchFamily="34" charset="-122"/>
-                <a:cs typeface="+mj-lt" pitchFamily="34" charset="-120"/>
-              </a:rPr>
-              <a:t>Aprobar reglas de datos</a:t>
-            </a:r>
-            <a:endParaRPr lang="en-US" sz="1800" dirty="0"/>
-          </a:p>
-        </p:txBody>
-      </p:sp>
-      <p:sp>
-        <p:nvSpPr>
-          <p:cNvPr id="12" name="Text 10"/>
-          <p:cNvSpPr txBox="1"/>
-          <p:nvPr/>
-        </p:nvSpPr>
-        <p:spPr>
-          <a:xfrm>
-            <a:off x="5486400" y="1810512"/>
-            <a:ext cx="3017520" cy="777240"/>
-          </a:xfrm>
-          <a:prstGeom prst="rect">
-            <a:avLst/>
-          </a:prstGeom>
-          <a:noFill/>
-          <a:ln/>
-        </p:spPr>
-        <p:txBody>
-          <a:bodyPr wrap="square" lIns="0" tIns="0" rIns="0" bIns="0" rtlCol="0" anchor="t"/>
-          <a:lstStyle/>
-          <a:p>
-            <a:pPr indent="0" marL="0">
-              <a:buNone/>
-            </a:pPr>
-            <a:r>
-              <a:rPr lang="en-US" sz="1400" dirty="0">
-                <a:solidFill>
-                  <a:schemeClr val="tx1"/>
-                </a:solidFill>
-              </a:rPr>
-              <a:t>Project compartido para ustedes; solo información pública hacia herramientas externas.</a:t>
+              </a:rPr>
+              <a:t>13 nov</a:t>
             </a:r>
             <a:endParaRPr lang="en-US" sz="1400" dirty="0"/>
           </a:p>
@@ -9067,26 +9656,24 @@
       </p:sp>
       <p:sp>
         <p:nvSpPr>
-          <p:cNvPr id="13" name="Decision 3"/>
+          <p:cNvPr id="17" name="Hito 13 nov"/>
           <p:cNvSpPr/>
           <p:nvPr/>
         </p:nvSpPr>
         <p:spPr>
           <a:xfrm>
-            <a:off x="457200" y="2834640"/>
-            <a:ext cx="4023360" cy="1463040"/>
-          </a:xfrm>
-          <a:prstGeom prst="roundRect">
-            <a:avLst>
-              <a:gd name="adj" fmla="val 7500"/>
-            </a:avLst>
+            <a:off x="5184648" y="2295144"/>
+            <a:ext cx="256032" cy="256032"/>
+          </a:xfrm>
+          <a:prstGeom prst="ellipse">
+            <a:avLst/>
           </a:prstGeom>
           <a:solidFill>
-            <a:schemeClr val="bg2"/>
+            <a:schemeClr val="accent3"/>
           </a:solidFill>
-          <a:ln w="9525">
+          <a:ln w="25400">
             <a:solidFill>
-              <a:schemeClr val="accent6"/>
+              <a:schemeClr val="bg1"/>
             </a:solidFill>
             <a:prstDash val="solid"/>
           </a:ln>
@@ -9094,24 +9681,132 @@
       </p:sp>
       <p:sp>
         <p:nvSpPr>
-          <p:cNvPr id="14" name="Numero 3"/>
+          <p:cNvPr id="18" name="Text 16"/>
+          <p:cNvSpPr txBox="1"/>
+          <p:nvPr/>
+        </p:nvSpPr>
+        <p:spPr>
+          <a:xfrm>
+            <a:off x="4626864" y="2788920"/>
+            <a:ext cx="1325880" cy="548640"/>
+          </a:xfrm>
+          <a:prstGeom prst="rect">
+            <a:avLst/>
+          </a:prstGeom>
+          <a:noFill/>
+          <a:ln/>
+        </p:spPr>
+        <p:txBody>
+          <a:bodyPr wrap="square" lIns="0" tIns="0" rIns="0" bIns="0" rtlCol="0" anchor="t"/>
+          <a:lstStyle/>
+          <a:p>
+            <a:pPr algn="ctr" indent="0" marL="0">
+              <a:buNone/>
+            </a:pPr>
+            <a:r>
+              <a:rPr lang="en-US" sz="1400" b="1" dirty="0">
+                <a:solidFill>
+                  <a:schemeClr val="tx1"/>
+                </a:solidFill>
+              </a:rPr>
+              <a:t>Entrega parcial</a:t>
+            </a:r>
+            <a:endParaRPr lang="en-US" sz="1400" dirty="0"/>
+          </a:p>
+        </p:txBody>
+      </p:sp>
+      <p:sp>
+        <p:nvSpPr>
+          <p:cNvPr id="19" name="Text 17"/>
+          <p:cNvSpPr txBox="1"/>
+          <p:nvPr/>
+        </p:nvSpPr>
+        <p:spPr>
+          <a:xfrm>
+            <a:off x="4626864" y="3429000"/>
+            <a:ext cx="1325880" cy="1188720"/>
+          </a:xfrm>
+          <a:prstGeom prst="rect">
+            <a:avLst/>
+          </a:prstGeom>
+          <a:noFill/>
+          <a:ln/>
+        </p:spPr>
+        <p:txBody>
+          <a:bodyPr wrap="square" lIns="0" tIns="0" rIns="0" bIns="0" rtlCol="0" anchor="t"/>
+          <a:lstStyle/>
+          <a:p>
+            <a:pPr algn="ctr" indent="0" marL="0">
+              <a:buNone/>
+            </a:pPr>
+            <a:r>
+              <a:rPr lang="en-US" sz="1200" dirty="0">
+                <a:solidFill>
+                  <a:schemeClr val="accent4"/>
+                </a:solidFill>
+              </a:rPr>
+              <a:t>Ranking preliminar y guía de uso del Project</a:t>
+            </a:r>
+            <a:endParaRPr lang="en-US" sz="1200" dirty="0"/>
+          </a:p>
+        </p:txBody>
+      </p:sp>
+      <p:sp>
+        <p:nvSpPr>
+          <p:cNvPr id="20" name="Text 18"/>
+          <p:cNvSpPr txBox="1"/>
+          <p:nvPr/>
+        </p:nvSpPr>
+        <p:spPr>
+          <a:xfrm>
+            <a:off x="6016752" y="1737360"/>
+            <a:ext cx="1325880" cy="457200"/>
+          </a:xfrm>
+          <a:prstGeom prst="rect">
+            <a:avLst/>
+          </a:prstGeom>
+          <a:noFill/>
+          <a:ln/>
+        </p:spPr>
+        <p:txBody>
+          <a:bodyPr wrap="square" lIns="0" tIns="0" rIns="0" bIns="0" rtlCol="0" anchor="t"/>
+          <a:lstStyle/>
+          <a:p>
+            <a:pPr algn="ctr" indent="0" marL="0">
+              <a:buNone/>
+            </a:pPr>
+            <a:r>
+              <a:rPr lang="en-US" sz="1400" b="1" dirty="0">
+                <a:solidFill>
+                  <a:schemeClr val="tx1"/>
+                </a:solidFill>
+              </a:rPr>
+              <a:t>17 nov – 3 dic</a:t>
+            </a:r>
+            <a:endParaRPr lang="en-US" sz="1400" dirty="0"/>
+          </a:p>
+        </p:txBody>
+      </p:sp>
+      <p:sp>
+        <p:nvSpPr>
+          <p:cNvPr id="21" name="Hito 17 nov – 3 dic"/>
           <p:cNvSpPr/>
           <p:nvPr/>
         </p:nvSpPr>
         <p:spPr>
           <a:xfrm>
-            <a:off x="640080" y="3017520"/>
-            <a:ext cx="457200" cy="457200"/>
+            <a:off x="6574536" y="2295144"/>
+            <a:ext cx="256032" cy="256032"/>
           </a:xfrm>
           <a:prstGeom prst="ellipse">
             <a:avLst/>
           </a:prstGeom>
           <a:solidFill>
-            <a:schemeClr val="accent1"/>
+            <a:schemeClr val="accent4"/>
           </a:solidFill>
-          <a:ln w="6350">
+          <a:ln w="25400">
             <a:solidFill>
-              <a:schemeClr val="accent1"/>
+              <a:schemeClr val="bg1"/>
             </a:solidFill>
             <a:prstDash val="solid"/>
           </a:ln>
@@ -9119,113 +9814,107 @@
       </p:sp>
       <p:sp>
         <p:nvSpPr>
-          <p:cNvPr id="15" name="Text 13"/>
-          <p:cNvSpPr txBox="1"/>
-          <p:nvPr/>
-        </p:nvSpPr>
-        <p:spPr>
-          <a:xfrm>
-            <a:off x="640080" y="3017520"/>
-            <a:ext cx="457200" cy="457200"/>
-          </a:xfrm>
-          <a:prstGeom prst="rect">
-            <a:avLst/>
-          </a:prstGeom>
-          <a:noFill/>
-          <a:ln/>
-        </p:spPr>
-        <p:txBody>
-          <a:bodyPr wrap="square" lIns="0" tIns="0" rIns="0" bIns="0" rtlCol="0" anchor="ctr"/>
+          <p:cNvPr id="22" name="Text 20"/>
+          <p:cNvSpPr txBox="1"/>
+          <p:nvPr/>
+        </p:nvSpPr>
+        <p:spPr>
+          <a:xfrm>
+            <a:off x="6016752" y="2788920"/>
+            <a:ext cx="1325880" cy="548640"/>
+          </a:xfrm>
+          <a:prstGeom prst="rect">
+            <a:avLst/>
+          </a:prstGeom>
+          <a:noFill/>
+          <a:ln/>
+        </p:spPr>
+        <p:txBody>
+          <a:bodyPr wrap="square" lIns="0" tIns="0" rIns="0" bIns="0" rtlCol="0" anchor="t"/>
           <a:lstStyle/>
           <a:p>
             <a:pPr algn="ctr" indent="0" marL="0">
               <a:buNone/>
             </a:pPr>
             <a:r>
-              <a:rPr lang="en-US" sz="1800" b="1" dirty="0">
+              <a:rPr lang="en-US" sz="1400" b="1" dirty="0">
+                <a:solidFill>
+                  <a:schemeClr val="accent4"/>
+                </a:solidFill>
+              </a:rPr>
+              <a:t>Pausa del consultor</a:t>
+            </a:r>
+            <a:endParaRPr lang="en-US" sz="1400" dirty="0"/>
+          </a:p>
+        </p:txBody>
+      </p:sp>
+      <p:sp>
+        <p:nvSpPr>
+          <p:cNvPr id="23" name="Text 21"/>
+          <p:cNvSpPr txBox="1"/>
+          <p:nvPr/>
+        </p:nvSpPr>
+        <p:spPr>
+          <a:xfrm>
+            <a:off x="6016752" y="3429000"/>
+            <a:ext cx="1325880" cy="1188720"/>
+          </a:xfrm>
+          <a:prstGeom prst="rect">
+            <a:avLst/>
+          </a:prstGeom>
+          <a:noFill/>
+          <a:ln/>
+        </p:spPr>
+        <p:txBody>
+          <a:bodyPr wrap="square" lIns="0" tIns="0" rIns="0" bIns="0" rtlCol="0" anchor="t"/>
+          <a:lstStyle/>
+          <a:p>
+            <a:pPr algn="ctr" indent="0" marL="0">
+              <a:buNone/>
+            </a:pPr>
+            <a:r>
+              <a:rPr lang="en-US" sz="1200" dirty="0">
+                <a:solidFill>
+                  <a:schemeClr val="accent4"/>
+                </a:solidFill>
+              </a:rPr>
+              <a:t>Sin construcción nueva; consultas básicas</a:t>
+            </a:r>
+            <a:endParaRPr lang="en-US" sz="1200" dirty="0"/>
+          </a:p>
+        </p:txBody>
+      </p:sp>
+      <p:sp>
+        <p:nvSpPr>
+          <p:cNvPr id="24" name="Text 22"/>
+          <p:cNvSpPr txBox="1"/>
+          <p:nvPr/>
+        </p:nvSpPr>
+        <p:spPr>
+          <a:xfrm>
+            <a:off x="7406640" y="1737360"/>
+            <a:ext cx="1325880" cy="457200"/>
+          </a:xfrm>
+          <a:prstGeom prst="rect">
+            <a:avLst/>
+          </a:prstGeom>
+          <a:noFill/>
+          <a:ln/>
+        </p:spPr>
+        <p:txBody>
+          <a:bodyPr wrap="square" lIns="0" tIns="0" rIns="0" bIns="0" rtlCol="0" anchor="t"/>
+          <a:lstStyle/>
+          <a:p>
+            <a:pPr algn="ctr" indent="0" marL="0">
+              <a:buNone/>
+            </a:pPr>
+            <a:r>
+              <a:rPr lang="en-US" sz="1400" b="1" dirty="0">
                 <a:solidFill>
                   <a:schemeClr val="tx1"/>
                 </a:solidFill>
-                <a:latin typeface="+mj-lt" pitchFamily="34" charset="0"/>
-                <a:ea typeface="+mj-lt" pitchFamily="34" charset="-122"/>
-                <a:cs typeface="+mj-lt" pitchFamily="34" charset="-120"/>
-              </a:rPr>
-              <a:t>3</a:t>
-            </a:r>
-            <a:endParaRPr lang="en-US" sz="1800" dirty="0"/>
-          </a:p>
-        </p:txBody>
-      </p:sp>
-      <p:sp>
-        <p:nvSpPr>
-          <p:cNvPr id="16" name="Text 14"/>
-          <p:cNvSpPr txBox="1"/>
-          <p:nvPr/>
-        </p:nvSpPr>
-        <p:spPr>
-          <a:xfrm>
-            <a:off x="1280160" y="3017520"/>
-            <a:ext cx="3017520" cy="365760"/>
-          </a:xfrm>
-          <a:prstGeom prst="rect">
-            <a:avLst/>
-          </a:prstGeom>
-          <a:noFill/>
-          <a:ln/>
-        </p:spPr>
-        <p:txBody>
-          <a:bodyPr wrap="square" lIns="0" tIns="0" rIns="0" bIns="0" rtlCol="0" anchor="t"/>
-          <a:lstStyle/>
-          <a:p>
-            <a:pPr indent="0" marL="0">
-              <a:buNone/>
-            </a:pPr>
-            <a:r>
-              <a:rPr lang="en-US" sz="1800" b="1" dirty="0">
-                <a:solidFill>
-                  <a:schemeClr val="tx1"/>
-                </a:solidFill>
-                <a:latin typeface="+mj-lt" pitchFamily="34" charset="0"/>
-                <a:ea typeface="+mj-lt" pitchFamily="34" charset="-122"/>
-                <a:cs typeface="+mj-lt" pitchFamily="34" charset="-120"/>
-              </a:rPr>
-              <a:t>Comprometer la línea base</a:t>
-            </a:r>
-            <a:endParaRPr lang="en-US" sz="1800" dirty="0"/>
-          </a:p>
-        </p:txBody>
-      </p:sp>
-      <p:sp>
-        <p:nvSpPr>
-          <p:cNvPr id="17" name="Text 15"/>
-          <p:cNvSpPr txBox="1"/>
-          <p:nvPr/>
-        </p:nvSpPr>
-        <p:spPr>
-          <a:xfrm>
-            <a:off x="1280160" y="3456432"/>
-            <a:ext cx="3017520" cy="777240"/>
-          </a:xfrm>
-          <a:prstGeom prst="rect">
-            <a:avLst/>
-          </a:prstGeom>
-          <a:noFill/>
-          <a:ln/>
-        </p:spPr>
-        <p:txBody>
-          <a:bodyPr wrap="square" lIns="0" tIns="0" rIns="0" bIns="0" rtlCol="0" anchor="t"/>
-          <a:lstStyle/>
-          <a:p>
-            <a:pPr indent="0" marL="0">
-              <a:buNone/>
-            </a:pPr>
-            <a:r>
-              <a:rPr lang="en-US" sz="1400" dirty="0">
-                <a:solidFill>
-                  <a:schemeClr val="tx1"/>
-                </a:solidFill>
-              </a:rPr>
-              <a:t>Quién entrega el maestro de artículos y las ventas por SKU, y para cuándo.</a:t>
+              </a:rPr>
+              <a:t>4–18 dic</a:t>
             </a:r>
             <a:endParaRPr lang="en-US" sz="1400" dirty="0"/>
           </a:p>
@@ -9233,26 +9922,24 @@
       </p:sp>
       <p:sp>
         <p:nvSpPr>
-          <p:cNvPr id="18" name="Decision 4"/>
+          <p:cNvPr id="25" name="Hito 4–18 dic"/>
           <p:cNvSpPr/>
           <p:nvPr/>
         </p:nvSpPr>
         <p:spPr>
           <a:xfrm>
-            <a:off x="4663440" y="2834640"/>
-            <a:ext cx="4023360" cy="1463040"/>
-          </a:xfrm>
-          <a:prstGeom prst="roundRect">
-            <a:avLst>
-              <a:gd name="adj" fmla="val 7500"/>
-            </a:avLst>
+            <a:off x="7964424" y="2295144"/>
+            <a:ext cx="256032" cy="256032"/>
+          </a:xfrm>
+          <a:prstGeom prst="ellipse">
+            <a:avLst/>
           </a:prstGeom>
           <a:solidFill>
-            <a:schemeClr val="bg2"/>
+            <a:schemeClr val="accent2"/>
           </a:solidFill>
-          <a:ln w="9525">
+          <a:ln w="25400">
             <a:solidFill>
-              <a:schemeClr val="accent6"/>
+              <a:schemeClr val="bg1"/>
             </a:solidFill>
             <a:prstDash val="solid"/>
           </a:ln>
@@ -9260,78 +9947,50 @@
       </p:sp>
       <p:sp>
         <p:nvSpPr>
-          <p:cNvPr id="19" name="Numero 4"/>
-          <p:cNvSpPr/>
-          <p:nvPr/>
-        </p:nvSpPr>
-        <p:spPr>
-          <a:xfrm>
-            <a:off x="4846320" y="3017520"/>
-            <a:ext cx="457200" cy="457200"/>
-          </a:xfrm>
-          <a:prstGeom prst="ellipse">
-            <a:avLst/>
-          </a:prstGeom>
-          <a:solidFill>
-            <a:schemeClr val="accent1"/>
-          </a:solidFill>
-          <a:ln w="6350">
-            <a:solidFill>
-              <a:schemeClr val="accent1"/>
-            </a:solidFill>
-            <a:prstDash val="solid"/>
-          </a:ln>
-        </p:spPr>
-      </p:sp>
-      <p:sp>
-        <p:nvSpPr>
-          <p:cNvPr id="20" name="Text 18"/>
-          <p:cNvSpPr txBox="1"/>
-          <p:nvPr/>
-        </p:nvSpPr>
-        <p:spPr>
-          <a:xfrm>
-            <a:off x="4846320" y="3017520"/>
-            <a:ext cx="457200" cy="457200"/>
-          </a:xfrm>
-          <a:prstGeom prst="rect">
-            <a:avLst/>
-          </a:prstGeom>
-          <a:noFill/>
-          <a:ln/>
-        </p:spPr>
-        <p:txBody>
-          <a:bodyPr wrap="square" lIns="0" tIns="0" rIns="0" bIns="0" rtlCol="0" anchor="ctr"/>
+          <p:cNvPr id="26" name="Text 24"/>
+          <p:cNvSpPr txBox="1"/>
+          <p:nvPr/>
+        </p:nvSpPr>
+        <p:spPr>
+          <a:xfrm>
+            <a:off x="7406640" y="2788920"/>
+            <a:ext cx="1325880" cy="548640"/>
+          </a:xfrm>
+          <a:prstGeom prst="rect">
+            <a:avLst/>
+          </a:prstGeom>
+          <a:noFill/>
+          <a:ln/>
+        </p:spPr>
+        <p:txBody>
+          <a:bodyPr wrap="square" lIns="0" tIns="0" rIns="0" bIns="0" rtlCol="0" anchor="t"/>
           <a:lstStyle/>
           <a:p>
             <a:pPr algn="ctr" indent="0" marL="0">
               <a:buNone/>
             </a:pPr>
             <a:r>
-              <a:rPr lang="en-US" sz="1800" b="1" dirty="0">
+              <a:rPr lang="en-US" sz="1400" b="1" dirty="0">
                 <a:solidFill>
                   <a:schemeClr val="tx1"/>
                 </a:solidFill>
-                <a:latin typeface="+mj-lt" pitchFamily="34" charset="0"/>
-                <a:ea typeface="+mj-lt" pitchFamily="34" charset="-122"/>
-                <a:cs typeface="+mj-lt" pitchFamily="34" charset="-120"/>
-              </a:rPr>
-              <a:t>4</a:t>
-            </a:r>
-            <a:endParaRPr lang="en-US" sz="1800" dirty="0"/>
-          </a:p>
-        </p:txBody>
-      </p:sp>
-      <p:sp>
-        <p:nvSpPr>
-          <p:cNvPr id="21" name="Text 19"/>
-          <p:cNvSpPr txBox="1"/>
-          <p:nvPr/>
-        </p:nvSpPr>
-        <p:spPr>
-          <a:xfrm>
-            <a:off x="5486400" y="3017520"/>
-            <a:ext cx="3017520" cy="365760"/>
+              </a:rPr>
+              <a:t>Cierre</a:t>
+            </a:r>
+            <a:endParaRPr lang="en-US" sz="1400" dirty="0"/>
+          </a:p>
+        </p:txBody>
+      </p:sp>
+      <p:sp>
+        <p:nvSpPr>
+          <p:cNvPr id="27" name="Text 25"/>
+          <p:cNvSpPr txBox="1"/>
+          <p:nvPr/>
+        </p:nvSpPr>
+        <p:spPr>
+          <a:xfrm>
+            <a:off x="7406640" y="3429000"/>
+            <a:ext cx="1325880" cy="1188720"/>
           </a:xfrm>
           <a:prstGeom prst="rect">
             <a:avLst/>
@@ -9343,57 +10002,18 @@
           <a:bodyPr wrap="square" lIns="0" tIns="0" rIns="0" bIns="0" rtlCol="0" anchor="t"/>
           <a:lstStyle/>
           <a:p>
-            <a:pPr indent="0" marL="0">
-              <a:buNone/>
-            </a:pPr>
-            <a:r>
-              <a:rPr lang="en-US" sz="1800" b="1" dirty="0">
-                <a:solidFill>
-                  <a:schemeClr val="tx1"/>
-                </a:solidFill>
-                <a:latin typeface="+mj-lt" pitchFamily="34" charset="0"/>
-                <a:ea typeface="+mj-lt" pitchFamily="34" charset="-122"/>
-                <a:cs typeface="+mj-lt" pitchFamily="34" charset="-120"/>
-              </a:rPr>
-              <a:t>Nombrar contrapartes</a:t>
-            </a:r>
-            <a:endParaRPr lang="en-US" sz="1800" dirty="0"/>
-          </a:p>
-        </p:txBody>
-      </p:sp>
-      <p:sp>
-        <p:nvSpPr>
-          <p:cNvPr id="22" name="Text 20"/>
-          <p:cNvSpPr txBox="1"/>
-          <p:nvPr/>
-        </p:nvSpPr>
-        <p:spPr>
-          <a:xfrm>
-            <a:off x="5486400" y="3456432"/>
-            <a:ext cx="3017520" cy="777240"/>
-          </a:xfrm>
-          <a:prstGeom prst="rect">
-            <a:avLst/>
-          </a:prstGeom>
-          <a:noFill/>
-          <a:ln/>
-        </p:spPr>
-        <p:txBody>
-          <a:bodyPr wrap="square" lIns="0" tIns="0" rIns="0" bIns="0" rtlCol="0" anchor="t"/>
-          <a:lstStyle/>
-          <a:p>
-            <a:pPr indent="0" marL="0">
-              <a:buNone/>
-            </a:pPr>
-            <a:r>
-              <a:rPr lang="en-US" sz="1400" dirty="0">
-                <a:solidFill>
-                  <a:schemeClr val="tx1"/>
-                </a:solidFill>
-              </a:rPr>
-              <a:t>Asuntos Regulatorios, Operaciones/Lerma y Finanzas; fecha de la siguiente sesión.</a:t>
-            </a:r>
-            <a:endParaRPr lang="en-US" sz="1400" dirty="0"/>
+            <a:pPr algn="ctr" indent="0" marL="0">
+              <a:buNone/>
+            </a:pPr>
+            <a:r>
+              <a:rPr lang="en-US" sz="1200" dirty="0">
+                <a:solidFill>
+                  <a:schemeClr val="accent4"/>
+                </a:solidFill>
+              </a:rPr>
+              <a:t>Make/Buy, shortlist, fichas de Compuerta 1 y Presupuesto 2027</a:t>
+            </a:r>
+            <a:endParaRPr lang="en-US" sz="1200" dirty="0"/>
           </a:p>
         </p:txBody>
       </p:sp>
@@ -9499,7 +10119,7 @@
                   <a:schemeClr val="tx1"/>
                 </a:solidFill>
               </a:rPr>
-              <a:t>Preguntas en vivo · 1 de 3</a:t>
+              <a:t>Cuatro decisiones para hoy</a:t>
             </a:r>
             <a:endParaRPr lang="en-US" sz="3200" dirty="0"/>
           </a:p>
@@ -9507,18 +10127,18 @@
       </p:sp>
       <p:sp>
         <p:nvSpPr>
-          <p:cNvPr id="3" name="Pregunta Q1"/>
+          <p:cNvPr id="3" name="Decision 1"/>
           <p:cNvSpPr/>
           <p:nvPr/>
         </p:nvSpPr>
         <p:spPr>
           <a:xfrm>
             <a:off x="457200" y="1188720"/>
-            <a:ext cx="8229600" cy="749808"/>
+            <a:ext cx="4023360" cy="1463040"/>
           </a:xfrm>
           <a:prstGeom prst="roundRect">
             <a:avLst>
-              <a:gd name="adj" fmla="val 12195"/>
+              <a:gd name="adj" fmla="val 7500"/>
             </a:avLst>
           </a:prstGeom>
           <a:solidFill>
@@ -9534,26 +10154,24 @@
       </p:sp>
       <p:sp>
         <p:nvSpPr>
-          <p:cNvPr id="4" name="Id Q1"/>
+          <p:cNvPr id="4" name="Numero 1"/>
           <p:cNvSpPr/>
           <p:nvPr/>
         </p:nvSpPr>
         <p:spPr>
           <a:xfrm>
-            <a:off x="594360" y="1380744"/>
-            <a:ext cx="548640" cy="365760"/>
-          </a:xfrm>
-          <a:prstGeom prst="roundRect">
-            <a:avLst>
-              <a:gd name="adj" fmla="val 20000"/>
-            </a:avLst>
+            <a:off x="640080" y="1371600"/>
+            <a:ext cx="457200" cy="457200"/>
+          </a:xfrm>
+          <a:prstGeom prst="ellipse">
+            <a:avLst/>
           </a:prstGeom>
           <a:solidFill>
-            <a:schemeClr val="tx1"/>
+            <a:schemeClr val="accent1"/>
           </a:solidFill>
           <a:ln w="6350">
             <a:solidFill>
-              <a:schemeClr val="tx1"/>
+              <a:schemeClr val="accent1"/>
             </a:solidFill>
             <a:prstDash val="solid"/>
           </a:ln>
@@ -9567,8 +10185,8 @@
         </p:nvSpPr>
         <p:spPr>
           <a:xfrm>
-            <a:off x="594360" y="1380744"/>
-            <a:ext cx="548640" cy="365760"/>
+            <a:off x="640080" y="1371600"/>
+            <a:ext cx="457200" cy="457200"/>
           </a:xfrm>
           <a:prstGeom prst="rect">
             <a:avLst/>
@@ -9584,12 +10202,90 @@
               <a:buNone/>
             </a:pPr>
             <a:r>
-              <a:rPr lang="en-US" sz="1400" b="1" dirty="0">
-                <a:solidFill>
-                  <a:schemeClr val="bg1"/>
-                </a:solidFill>
-              </a:rPr>
-              <a:t>Q1</a:t>
+              <a:rPr lang="en-US" sz="1800" b="1" dirty="0">
+                <a:solidFill>
+                  <a:schemeClr val="tx1"/>
+                </a:solidFill>
+                <a:latin typeface="+mj-lt" pitchFamily="34" charset="0"/>
+                <a:ea typeface="+mj-lt" pitchFamily="34" charset="-122"/>
+                <a:cs typeface="+mj-lt" pitchFamily="34" charset="-120"/>
+              </a:rPr>
+              <a:t>1</a:t>
+            </a:r>
+            <a:endParaRPr lang="en-US" sz="1800" dirty="0"/>
+          </a:p>
+        </p:txBody>
+      </p:sp>
+      <p:sp>
+        <p:nvSpPr>
+          <p:cNvPr id="6" name="Text 4"/>
+          <p:cNvSpPr txBox="1"/>
+          <p:nvPr/>
+        </p:nvSpPr>
+        <p:spPr>
+          <a:xfrm>
+            <a:off x="1280160" y="1371600"/>
+            <a:ext cx="3017520" cy="365760"/>
+          </a:xfrm>
+          <a:prstGeom prst="rect">
+            <a:avLst/>
+          </a:prstGeom>
+          <a:noFill/>
+          <a:ln/>
+        </p:spPr>
+        <p:txBody>
+          <a:bodyPr wrap="square" lIns="0" tIns="0" rIns="0" bIns="0" rtlCol="0" anchor="t"/>
+          <a:lstStyle/>
+          <a:p>
+            <a:pPr indent="0" marL="0">
+              <a:buNone/>
+            </a:pPr>
+            <a:r>
+              <a:rPr lang="en-US" sz="1800" b="1" dirty="0">
+                <a:solidFill>
+                  <a:schemeClr val="tx1"/>
+                </a:solidFill>
+                <a:latin typeface="+mj-lt" pitchFamily="34" charset="0"/>
+                <a:ea typeface="+mj-lt" pitchFamily="34" charset="-122"/>
+                <a:cs typeface="+mj-lt" pitchFamily="34" charset="-120"/>
+              </a:rPr>
+              <a:t>Definir la meta</a:t>
+            </a:r>
+            <a:endParaRPr lang="en-US" sz="1800" dirty="0"/>
+          </a:p>
+        </p:txBody>
+      </p:sp>
+      <p:sp>
+        <p:nvSpPr>
+          <p:cNvPr id="7" name="Text 5"/>
+          <p:cNvSpPr txBox="1"/>
+          <p:nvPr/>
+        </p:nvSpPr>
+        <p:spPr>
+          <a:xfrm>
+            <a:off x="1280160" y="1810512"/>
+            <a:ext cx="3017520" cy="777240"/>
+          </a:xfrm>
+          <a:prstGeom prst="rect">
+            <a:avLst/>
+          </a:prstGeom>
+          <a:noFill/>
+          <a:ln/>
+        </p:spPr>
+        <p:txBody>
+          <a:bodyPr wrap="square" lIns="0" tIns="0" rIns="0" bIns="0" rtlCol="0" anchor="t"/>
+          <a:lstStyle/>
+          <a:p>
+            <a:pPr indent="0" marL="0">
+              <a:buNone/>
+            </a:pPr>
+            <a:r>
+              <a:rPr lang="en-US" sz="1400" dirty="0">
+                <a:solidFill>
+                  <a:schemeClr val="tx1"/>
+                </a:solidFill>
+              </a:rPr>
+              <a:t>300 SKUs en cartera o 300 lanzamientos; qué cuenta como SKU y en qué plazo.</a:t>
             </a:r>
             <a:endParaRPr lang="en-US" sz="1400" dirty="0"/>
           </a:p>
@@ -9597,68 +10293,18 @@
       </p:sp>
       <p:sp>
         <p:nvSpPr>
-          <p:cNvPr id="6" name="Text 4"/>
-          <p:cNvSpPr txBox="1"/>
-          <p:nvPr/>
-        </p:nvSpPr>
-        <p:spPr>
-          <a:xfrm>
-            <a:off x="1325880" y="1188720"/>
-            <a:ext cx="7223760" cy="749808"/>
-          </a:xfrm>
-          <a:prstGeom prst="rect">
-            <a:avLst/>
-          </a:prstGeom>
-          <a:noFill/>
-          <a:ln/>
-        </p:spPr>
-        <p:txBody>
-          <a:bodyPr wrap="square" lIns="0" tIns="0" rIns="0" bIns="0" rtlCol="0" anchor="ctr"/>
-          <a:lstStyle/>
-          <a:p>
-            <a:pPr indent="0" marL="0">
-              <a:buNone/>
-            </a:pPr>
-            <a:r>
-              <a:rPr lang="en-US" sz="1800" b="1" dirty="0">
-                <a:solidFill>
-                  <a:schemeClr val="tx1"/>
-                </a:solidFill>
-              </a:rPr>
-              <a:t>¿300 en cartera o 300 lanzamientos?</a:t>
-            </a:r>
-            <a:endParaRPr lang="en-US" sz="1800" dirty="0"/>
-          </a:p>
-          <a:p>
-            <a:pPr indent="0" marL="0">
-              <a:buNone/>
-            </a:pPr>
-            <a:r>
-              <a:rPr lang="en-US" sz="1200" dirty="0">
-                <a:solidFill>
-                  <a:schemeClr val="accent4"/>
-                </a:solidFill>
-              </a:rPr>
-              <a:t>Responde: David y Sara · Meta</a:t>
-            </a:r>
-            <a:endParaRPr lang="en-US" sz="1800" dirty="0"/>
-          </a:p>
-        </p:txBody>
-      </p:sp>
-      <p:sp>
-        <p:nvSpPr>
-          <p:cNvPr id="7" name="Pregunta Q2"/>
+          <p:cNvPr id="8" name="Decision 2"/>
           <p:cNvSpPr/>
           <p:nvPr/>
         </p:nvSpPr>
         <p:spPr>
           <a:xfrm>
-            <a:off x="457200" y="2057400"/>
-            <a:ext cx="8229600" cy="749808"/>
+            <a:off x="4663440" y="1188720"/>
+            <a:ext cx="4023360" cy="1463040"/>
           </a:xfrm>
           <a:prstGeom prst="roundRect">
             <a:avLst>
-              <a:gd name="adj" fmla="val 12195"/>
+              <a:gd name="adj" fmla="val 7500"/>
             </a:avLst>
           </a:prstGeom>
           <a:solidFill>
@@ -9674,26 +10320,24 @@
       </p:sp>
       <p:sp>
         <p:nvSpPr>
-          <p:cNvPr id="8" name="Id Q2"/>
+          <p:cNvPr id="9" name="Numero 2"/>
           <p:cNvSpPr/>
           <p:nvPr/>
         </p:nvSpPr>
         <p:spPr>
           <a:xfrm>
-            <a:off x="594360" y="2249424"/>
-            <a:ext cx="548640" cy="365760"/>
-          </a:xfrm>
-          <a:prstGeom prst="roundRect">
-            <a:avLst>
-              <a:gd name="adj" fmla="val 20000"/>
-            </a:avLst>
+            <a:off x="4846320" y="1371600"/>
+            <a:ext cx="457200" cy="457200"/>
+          </a:xfrm>
+          <a:prstGeom prst="ellipse">
+            <a:avLst/>
           </a:prstGeom>
           <a:solidFill>
-            <a:schemeClr val="tx1"/>
+            <a:schemeClr val="accent1"/>
           </a:solidFill>
           <a:ln w="6350">
             <a:solidFill>
-              <a:schemeClr val="tx1"/>
+              <a:schemeClr val="accent1"/>
             </a:solidFill>
             <a:prstDash val="solid"/>
           </a:ln>
@@ -9701,14 +10345,14 @@
       </p:sp>
       <p:sp>
         <p:nvSpPr>
-          <p:cNvPr id="9" name="Text 7"/>
-          <p:cNvSpPr txBox="1"/>
-          <p:nvPr/>
-        </p:nvSpPr>
-        <p:spPr>
-          <a:xfrm>
-            <a:off x="594360" y="2249424"/>
-            <a:ext cx="548640" cy="365760"/>
+          <p:cNvPr id="10" name="Text 8"/>
+          <p:cNvSpPr txBox="1"/>
+          <p:nvPr/>
+        </p:nvSpPr>
+        <p:spPr>
+          <a:xfrm>
+            <a:off x="4846320" y="1371600"/>
+            <a:ext cx="457200" cy="457200"/>
           </a:xfrm>
           <a:prstGeom prst="rect">
             <a:avLst/>
@@ -9724,12 +10368,90 @@
               <a:buNone/>
             </a:pPr>
             <a:r>
-              <a:rPr lang="en-US" sz="1400" b="1" dirty="0">
-                <a:solidFill>
-                  <a:schemeClr val="bg1"/>
-                </a:solidFill>
-              </a:rPr>
-              <a:t>Q2</a:t>
+              <a:rPr lang="en-US" sz="1800" b="1" dirty="0">
+                <a:solidFill>
+                  <a:schemeClr val="tx1"/>
+                </a:solidFill>
+                <a:latin typeface="+mj-lt" pitchFamily="34" charset="0"/>
+                <a:ea typeface="+mj-lt" pitchFamily="34" charset="-122"/>
+                <a:cs typeface="+mj-lt" pitchFamily="34" charset="-120"/>
+              </a:rPr>
+              <a:t>2</a:t>
+            </a:r>
+            <a:endParaRPr lang="en-US" sz="1800" dirty="0"/>
+          </a:p>
+        </p:txBody>
+      </p:sp>
+      <p:sp>
+        <p:nvSpPr>
+          <p:cNvPr id="11" name="Text 9"/>
+          <p:cNvSpPr txBox="1"/>
+          <p:nvPr/>
+        </p:nvSpPr>
+        <p:spPr>
+          <a:xfrm>
+            <a:off x="5486400" y="1371600"/>
+            <a:ext cx="3017520" cy="365760"/>
+          </a:xfrm>
+          <a:prstGeom prst="rect">
+            <a:avLst/>
+          </a:prstGeom>
+          <a:noFill/>
+          <a:ln/>
+        </p:spPr>
+        <p:txBody>
+          <a:bodyPr wrap="square" lIns="0" tIns="0" rIns="0" bIns="0" rtlCol="0" anchor="t"/>
+          <a:lstStyle/>
+          <a:p>
+            <a:pPr indent="0" marL="0">
+              <a:buNone/>
+            </a:pPr>
+            <a:r>
+              <a:rPr lang="en-US" sz="1800" b="1" dirty="0">
+                <a:solidFill>
+                  <a:schemeClr val="tx1"/>
+                </a:solidFill>
+                <a:latin typeface="+mj-lt" pitchFamily="34" charset="0"/>
+                <a:ea typeface="+mj-lt" pitchFamily="34" charset="-122"/>
+                <a:cs typeface="+mj-lt" pitchFamily="34" charset="-120"/>
+              </a:rPr>
+              <a:t>Aprobar reglas de datos</a:t>
+            </a:r>
+            <a:endParaRPr lang="en-US" sz="1800" dirty="0"/>
+          </a:p>
+        </p:txBody>
+      </p:sp>
+      <p:sp>
+        <p:nvSpPr>
+          <p:cNvPr id="12" name="Text 10"/>
+          <p:cNvSpPr txBox="1"/>
+          <p:nvPr/>
+        </p:nvSpPr>
+        <p:spPr>
+          <a:xfrm>
+            <a:off x="5486400" y="1810512"/>
+            <a:ext cx="3017520" cy="777240"/>
+          </a:xfrm>
+          <a:prstGeom prst="rect">
+            <a:avLst/>
+          </a:prstGeom>
+          <a:noFill/>
+          <a:ln/>
+        </p:spPr>
+        <p:txBody>
+          <a:bodyPr wrap="square" lIns="0" tIns="0" rIns="0" bIns="0" rtlCol="0" anchor="t"/>
+          <a:lstStyle/>
+          <a:p>
+            <a:pPr indent="0" marL="0">
+              <a:buNone/>
+            </a:pPr>
+            <a:r>
+              <a:rPr lang="en-US" sz="1400" dirty="0">
+                <a:solidFill>
+                  <a:schemeClr val="tx1"/>
+                </a:solidFill>
+              </a:rPr>
+              <a:t>Project compartido para ustedes; solo información pública hacia herramientas externas.</a:t>
             </a:r>
             <a:endParaRPr lang="en-US" sz="1400" dirty="0"/>
           </a:p>
@@ -9737,68 +10459,18 @@
       </p:sp>
       <p:sp>
         <p:nvSpPr>
-          <p:cNvPr id="10" name="Text 8"/>
-          <p:cNvSpPr txBox="1"/>
-          <p:nvPr/>
-        </p:nvSpPr>
-        <p:spPr>
-          <a:xfrm>
-            <a:off x="1325880" y="2057400"/>
-            <a:ext cx="7223760" cy="749808"/>
-          </a:xfrm>
-          <a:prstGeom prst="rect">
-            <a:avLst/>
-          </a:prstGeom>
-          <a:noFill/>
-          <a:ln/>
-        </p:spPr>
-        <p:txBody>
-          <a:bodyPr wrap="square" lIns="0" tIns="0" rIns="0" bIns="0" rtlCol="0" anchor="ctr"/>
-          <a:lstStyle/>
-          <a:p>
-            <a:pPr indent="0" marL="0">
-              <a:buNone/>
-            </a:pPr>
-            <a:r>
-              <a:rPr lang="en-US" sz="1800" b="1" dirty="0">
-                <a:solidFill>
-                  <a:schemeClr val="tx1"/>
-                </a:solidFill>
-              </a:rPr>
-              <a:t>¿Plazo de 2 o de 3 años?</a:t>
-            </a:r>
-            <a:endParaRPr lang="en-US" sz="1800" dirty="0"/>
-          </a:p>
-          <a:p>
-            <a:pPr indent="0" marL="0">
-              <a:buNone/>
-            </a:pPr>
-            <a:r>
-              <a:rPr lang="en-US" sz="1200" dirty="0">
-                <a:solidFill>
-                  <a:schemeClr val="accent4"/>
-                </a:solidFill>
-              </a:rPr>
-              <a:t>Responde: David · Meta</a:t>
-            </a:r>
-            <a:endParaRPr lang="en-US" sz="1800" dirty="0"/>
-          </a:p>
-        </p:txBody>
-      </p:sp>
-      <p:sp>
-        <p:nvSpPr>
-          <p:cNvPr id="11" name="Pregunta Q3"/>
+          <p:cNvPr id="13" name="Decision 3"/>
           <p:cNvSpPr/>
           <p:nvPr/>
         </p:nvSpPr>
         <p:spPr>
           <a:xfrm>
-            <a:off x="457200" y="2926080"/>
-            <a:ext cx="8229600" cy="749808"/>
+            <a:off x="457200" y="2834640"/>
+            <a:ext cx="4023360" cy="1463040"/>
           </a:xfrm>
           <a:prstGeom prst="roundRect">
             <a:avLst>
-              <a:gd name="adj" fmla="val 12195"/>
+              <a:gd name="adj" fmla="val 7500"/>
             </a:avLst>
           </a:prstGeom>
           <a:solidFill>
@@ -9814,26 +10486,24 @@
       </p:sp>
       <p:sp>
         <p:nvSpPr>
-          <p:cNvPr id="12" name="Id Q3"/>
+          <p:cNvPr id="14" name="Numero 3"/>
           <p:cNvSpPr/>
           <p:nvPr/>
         </p:nvSpPr>
         <p:spPr>
           <a:xfrm>
-            <a:off x="594360" y="3118104"/>
-            <a:ext cx="548640" cy="365760"/>
-          </a:xfrm>
-          <a:prstGeom prst="roundRect">
-            <a:avLst>
-              <a:gd name="adj" fmla="val 20000"/>
-            </a:avLst>
+            <a:off x="640080" y="3017520"/>
+            <a:ext cx="457200" cy="457200"/>
+          </a:xfrm>
+          <a:prstGeom prst="ellipse">
+            <a:avLst/>
           </a:prstGeom>
           <a:solidFill>
-            <a:schemeClr val="tx1"/>
+            <a:schemeClr val="accent1"/>
           </a:solidFill>
           <a:ln w="6350">
             <a:solidFill>
-              <a:schemeClr val="tx1"/>
+              <a:schemeClr val="accent1"/>
             </a:solidFill>
             <a:prstDash val="solid"/>
           </a:ln>
@@ -9841,14 +10511,14 @@
       </p:sp>
       <p:sp>
         <p:nvSpPr>
-          <p:cNvPr id="13" name="Text 11"/>
-          <p:cNvSpPr txBox="1"/>
-          <p:nvPr/>
-        </p:nvSpPr>
-        <p:spPr>
-          <a:xfrm>
-            <a:off x="594360" y="3118104"/>
-            <a:ext cx="548640" cy="365760"/>
+          <p:cNvPr id="15" name="Text 13"/>
+          <p:cNvSpPr txBox="1"/>
+          <p:nvPr/>
+        </p:nvSpPr>
+        <p:spPr>
+          <a:xfrm>
+            <a:off x="640080" y="3017520"/>
+            <a:ext cx="457200" cy="457200"/>
           </a:xfrm>
           <a:prstGeom prst="rect">
             <a:avLst/>
@@ -9864,12 +10534,90 @@
               <a:buNone/>
             </a:pPr>
             <a:r>
-              <a:rPr lang="en-US" sz="1400" b="1" dirty="0">
-                <a:solidFill>
-                  <a:schemeClr val="bg1"/>
-                </a:solidFill>
-              </a:rPr>
-              <a:t>Q3</a:t>
+              <a:rPr lang="en-US" sz="1800" b="1" dirty="0">
+                <a:solidFill>
+                  <a:schemeClr val="tx1"/>
+                </a:solidFill>
+                <a:latin typeface="+mj-lt" pitchFamily="34" charset="0"/>
+                <a:ea typeface="+mj-lt" pitchFamily="34" charset="-122"/>
+                <a:cs typeface="+mj-lt" pitchFamily="34" charset="-120"/>
+              </a:rPr>
+              <a:t>3</a:t>
+            </a:r>
+            <a:endParaRPr lang="en-US" sz="1800" dirty="0"/>
+          </a:p>
+        </p:txBody>
+      </p:sp>
+      <p:sp>
+        <p:nvSpPr>
+          <p:cNvPr id="16" name="Text 14"/>
+          <p:cNvSpPr txBox="1"/>
+          <p:nvPr/>
+        </p:nvSpPr>
+        <p:spPr>
+          <a:xfrm>
+            <a:off x="1280160" y="3017520"/>
+            <a:ext cx="3017520" cy="365760"/>
+          </a:xfrm>
+          <a:prstGeom prst="rect">
+            <a:avLst/>
+          </a:prstGeom>
+          <a:noFill/>
+          <a:ln/>
+        </p:spPr>
+        <p:txBody>
+          <a:bodyPr wrap="square" lIns="0" tIns="0" rIns="0" bIns="0" rtlCol="0" anchor="t"/>
+          <a:lstStyle/>
+          <a:p>
+            <a:pPr indent="0" marL="0">
+              <a:buNone/>
+            </a:pPr>
+            <a:r>
+              <a:rPr lang="en-US" sz="1800" b="1" dirty="0">
+                <a:solidFill>
+                  <a:schemeClr val="tx1"/>
+                </a:solidFill>
+                <a:latin typeface="+mj-lt" pitchFamily="34" charset="0"/>
+                <a:ea typeface="+mj-lt" pitchFamily="34" charset="-122"/>
+                <a:cs typeface="+mj-lt" pitchFamily="34" charset="-120"/>
+              </a:rPr>
+              <a:t>Comprometer la línea base</a:t>
+            </a:r>
+            <a:endParaRPr lang="en-US" sz="1800" dirty="0"/>
+          </a:p>
+        </p:txBody>
+      </p:sp>
+      <p:sp>
+        <p:nvSpPr>
+          <p:cNvPr id="17" name="Text 15"/>
+          <p:cNvSpPr txBox="1"/>
+          <p:nvPr/>
+        </p:nvSpPr>
+        <p:spPr>
+          <a:xfrm>
+            <a:off x="1280160" y="3456432"/>
+            <a:ext cx="3017520" cy="777240"/>
+          </a:xfrm>
+          <a:prstGeom prst="rect">
+            <a:avLst/>
+          </a:prstGeom>
+          <a:noFill/>
+          <a:ln/>
+        </p:spPr>
+        <p:txBody>
+          <a:bodyPr wrap="square" lIns="0" tIns="0" rIns="0" bIns="0" rtlCol="0" anchor="t"/>
+          <a:lstStyle/>
+          <a:p>
+            <a:pPr indent="0" marL="0">
+              <a:buNone/>
+            </a:pPr>
+            <a:r>
+              <a:rPr lang="en-US" sz="1400" dirty="0">
+                <a:solidFill>
+                  <a:schemeClr val="tx1"/>
+                </a:solidFill>
+              </a:rPr>
+              <a:t>Quién entrega el maestro de artículos y las ventas por SKU, y para cuándo.</a:t>
             </a:r>
             <a:endParaRPr lang="en-US" sz="1400" dirty="0"/>
           </a:p>
@@ -9877,68 +10625,18 @@
       </p:sp>
       <p:sp>
         <p:nvSpPr>
-          <p:cNvPr id="14" name="Text 12"/>
-          <p:cNvSpPr txBox="1"/>
-          <p:nvPr/>
-        </p:nvSpPr>
-        <p:spPr>
-          <a:xfrm>
-            <a:off x="1325880" y="2926080"/>
-            <a:ext cx="7223760" cy="749808"/>
-          </a:xfrm>
-          <a:prstGeom prst="rect">
-            <a:avLst/>
-          </a:prstGeom>
-          <a:noFill/>
-          <a:ln/>
-        </p:spPr>
-        <p:txBody>
-          <a:bodyPr wrap="square" lIns="0" tIns="0" rIns="0" bIns="0" rtlCol="0" anchor="ctr"/>
-          <a:lstStyle/>
-          <a:p>
-            <a:pPr indent="0" marL="0">
-              <a:buNone/>
-            </a:pPr>
-            <a:r>
-              <a:rPr lang="en-US" sz="1800" b="1" dirty="0">
-                <a:solidFill>
-                  <a:schemeClr val="tx1"/>
-                </a:solidFill>
-              </a:rPr>
-              <a:t>¿Quién entrega maestro y ventas, y cuándo?</a:t>
-            </a:r>
-            <a:endParaRPr lang="en-US" sz="1800" dirty="0"/>
-          </a:p>
-          <a:p>
-            <a:pPr indent="0" marL="0">
-              <a:buNone/>
-            </a:pPr>
-            <a:r>
-              <a:rPr lang="en-US" sz="1200" dirty="0">
-                <a:solidFill>
-                  <a:schemeClr val="accent4"/>
-                </a:solidFill>
-              </a:rPr>
-              <a:t>Responde: David y Sara · Línea base</a:t>
-            </a:r>
-            <a:endParaRPr lang="en-US" sz="1800" dirty="0"/>
-          </a:p>
-        </p:txBody>
-      </p:sp>
-      <p:sp>
-        <p:nvSpPr>
-          <p:cNvPr id="15" name="Pregunta Q4"/>
+          <p:cNvPr id="18" name="Decision 4"/>
           <p:cNvSpPr/>
           <p:nvPr/>
         </p:nvSpPr>
         <p:spPr>
           <a:xfrm>
-            <a:off x="457200" y="3794760"/>
-            <a:ext cx="8229600" cy="749808"/>
+            <a:off x="4663440" y="2834640"/>
+            <a:ext cx="4023360" cy="1463040"/>
           </a:xfrm>
           <a:prstGeom prst="roundRect">
             <a:avLst>
-              <a:gd name="adj" fmla="val 12195"/>
+              <a:gd name="adj" fmla="val 7500"/>
             </a:avLst>
           </a:prstGeom>
           <a:solidFill>
@@ -9954,26 +10652,24 @@
       </p:sp>
       <p:sp>
         <p:nvSpPr>
-          <p:cNvPr id="16" name="Id Q4"/>
+          <p:cNvPr id="19" name="Numero 4"/>
           <p:cNvSpPr/>
           <p:nvPr/>
         </p:nvSpPr>
         <p:spPr>
           <a:xfrm>
-            <a:off x="594360" y="3986784"/>
-            <a:ext cx="548640" cy="365760"/>
-          </a:xfrm>
-          <a:prstGeom prst="roundRect">
-            <a:avLst>
-              <a:gd name="adj" fmla="val 20000"/>
-            </a:avLst>
+            <a:off x="4846320" y="3017520"/>
+            <a:ext cx="457200" cy="457200"/>
+          </a:xfrm>
+          <a:prstGeom prst="ellipse">
+            <a:avLst/>
           </a:prstGeom>
           <a:solidFill>
-            <a:schemeClr val="tx1"/>
+            <a:schemeClr val="accent1"/>
           </a:solidFill>
           <a:ln w="6350">
             <a:solidFill>
-              <a:schemeClr val="tx1"/>
+              <a:schemeClr val="accent1"/>
             </a:solidFill>
             <a:prstDash val="solid"/>
           </a:ln>
@@ -9981,14 +10677,14 @@
       </p:sp>
       <p:sp>
         <p:nvSpPr>
-          <p:cNvPr id="17" name="Text 15"/>
-          <p:cNvSpPr txBox="1"/>
-          <p:nvPr/>
-        </p:nvSpPr>
-        <p:spPr>
-          <a:xfrm>
-            <a:off x="594360" y="3986784"/>
-            <a:ext cx="548640" cy="365760"/>
+          <p:cNvPr id="20" name="Text 18"/>
+          <p:cNvSpPr txBox="1"/>
+          <p:nvPr/>
+        </p:nvSpPr>
+        <p:spPr>
+          <a:xfrm>
+            <a:off x="4846320" y="3017520"/>
+            <a:ext cx="457200" cy="457200"/>
           </a:xfrm>
           <a:prstGeom prst="rect">
             <a:avLst/>
@@ -10004,64 +10700,92 @@
               <a:buNone/>
             </a:pPr>
             <a:r>
-              <a:rPr lang="en-US" sz="1400" b="1" dirty="0">
-                <a:solidFill>
-                  <a:schemeClr val="bg1"/>
-                </a:solidFill>
-              </a:rPr>
-              <a:t>Q4</a:t>
+              <a:rPr lang="en-US" sz="1800" b="1" dirty="0">
+                <a:solidFill>
+                  <a:schemeClr val="tx1"/>
+                </a:solidFill>
+                <a:latin typeface="+mj-lt" pitchFamily="34" charset="0"/>
+                <a:ea typeface="+mj-lt" pitchFamily="34" charset="-122"/>
+                <a:cs typeface="+mj-lt" pitchFamily="34" charset="-120"/>
+              </a:rPr>
+              <a:t>4</a:t>
+            </a:r>
+            <a:endParaRPr lang="en-US" sz="1800" dirty="0"/>
+          </a:p>
+        </p:txBody>
+      </p:sp>
+      <p:sp>
+        <p:nvSpPr>
+          <p:cNvPr id="21" name="Text 19"/>
+          <p:cNvSpPr txBox="1"/>
+          <p:nvPr/>
+        </p:nvSpPr>
+        <p:spPr>
+          <a:xfrm>
+            <a:off x="5486400" y="3017520"/>
+            <a:ext cx="3017520" cy="365760"/>
+          </a:xfrm>
+          <a:prstGeom prst="rect">
+            <a:avLst/>
+          </a:prstGeom>
+          <a:noFill/>
+          <a:ln/>
+        </p:spPr>
+        <p:txBody>
+          <a:bodyPr wrap="square" lIns="0" tIns="0" rIns="0" bIns="0" rtlCol="0" anchor="t"/>
+          <a:lstStyle/>
+          <a:p>
+            <a:pPr indent="0" marL="0">
+              <a:buNone/>
+            </a:pPr>
+            <a:r>
+              <a:rPr lang="en-US" sz="1800" b="1" dirty="0">
+                <a:solidFill>
+                  <a:schemeClr val="tx1"/>
+                </a:solidFill>
+                <a:latin typeface="+mj-lt" pitchFamily="34" charset="0"/>
+                <a:ea typeface="+mj-lt" pitchFamily="34" charset="-122"/>
+                <a:cs typeface="+mj-lt" pitchFamily="34" charset="-120"/>
+              </a:rPr>
+              <a:t>Nombrar contrapartes</a:t>
+            </a:r>
+            <a:endParaRPr lang="en-US" sz="1800" dirty="0"/>
+          </a:p>
+        </p:txBody>
+      </p:sp>
+      <p:sp>
+        <p:nvSpPr>
+          <p:cNvPr id="22" name="Text 20"/>
+          <p:cNvSpPr txBox="1"/>
+          <p:nvPr/>
+        </p:nvSpPr>
+        <p:spPr>
+          <a:xfrm>
+            <a:off x="5486400" y="3456432"/>
+            <a:ext cx="3017520" cy="777240"/>
+          </a:xfrm>
+          <a:prstGeom prst="rect">
+            <a:avLst/>
+          </a:prstGeom>
+          <a:noFill/>
+          <a:ln/>
+        </p:spPr>
+        <p:txBody>
+          <a:bodyPr wrap="square" lIns="0" tIns="0" rIns="0" bIns="0" rtlCol="0" anchor="t"/>
+          <a:lstStyle/>
+          <a:p>
+            <a:pPr indent="0" marL="0">
+              <a:buNone/>
+            </a:pPr>
+            <a:r>
+              <a:rPr lang="en-US" sz="1400" dirty="0">
+                <a:solidFill>
+                  <a:schemeClr val="tx1"/>
+                </a:solidFill>
+              </a:rPr>
+              <a:t>Asuntos Regulatorios, Operaciones/Lerma y Finanzas; fecha de la siguiente sesión.</a:t>
             </a:r>
             <a:endParaRPr lang="en-US" sz="1400" dirty="0"/>
-          </a:p>
-        </p:txBody>
-      </p:sp>
-      <p:sp>
-        <p:nvSpPr>
-          <p:cNvPr id="18" name="Text 16"/>
-          <p:cNvSpPr txBox="1"/>
-          <p:nvPr/>
-        </p:nvSpPr>
-        <p:spPr>
-          <a:xfrm>
-            <a:off x="1325880" y="3794760"/>
-            <a:ext cx="7223760" cy="749808"/>
-          </a:xfrm>
-          <a:prstGeom prst="rect">
-            <a:avLst/>
-          </a:prstGeom>
-          <a:noFill/>
-          <a:ln/>
-        </p:spPr>
-        <p:txBody>
-          <a:bodyPr wrap="square" lIns="0" tIns="0" rIns="0" bIns="0" rtlCol="0" anchor="ctr"/>
-          <a:lstStyle/>
-          <a:p>
-            <a:pPr indent="0" marL="0">
-              <a:buNone/>
-            </a:pPr>
-            <a:r>
-              <a:rPr lang="en-US" sz="1800" b="1" dirty="0">
-                <a:solidFill>
-                  <a:schemeClr val="tx1"/>
-                </a:solidFill>
-              </a:rPr>
-              <a:t>¿Dónde se atora hoy un lanzamiento?</a:t>
-            </a:r>
-            <a:endParaRPr lang="en-US" sz="1800" dirty="0"/>
-          </a:p>
-          <a:p>
-            <a:pPr indent="0" marL="0">
-              <a:buNone/>
-            </a:pPr>
-            <a:r>
-              <a:rPr lang="en-US" sz="1200" dirty="0">
-                <a:solidFill>
-                  <a:schemeClr val="accent4"/>
-                </a:solidFill>
-              </a:rPr>
-              <a:t>Responde: Sara · Proceso</a:t>
-            </a:r>
-            <a:endParaRPr lang="en-US" sz="1800" dirty="0"/>
           </a:p>
         </p:txBody>
       </p:sp>
